--- a/exports/pptx/lessons/middle-module-08-yoga/day-05-sun-salutation-2.pptx
+++ b/exports/pptx/lessons/middle-module-08-yoga/day-05-sun-salutation-2.pptx
@@ -19,9 +19,13 @@
     <p:sldId id="267" r:id="rId13"/>
     <p:sldId id="268" r:id="rId14"/>
     <p:sldId id="269" r:id="rId15"/>
+    <p:sldId id="270" r:id="rId16"/>
+    <p:sldId id="271" r:id="rId17"/>
+    <p:sldId id="272" r:id="rId18"/>
+    <p:sldId id="273" r:id="rId19"/>
   </p:sldIdLst>
   <p:notesMasterIdLst>
-    <p:notesMasterId r:id="rId16"/>
+    <p:notesMasterId r:id="rId20"/>
   </p:notesMasterIdLst>
   <p:sldSz cx="9144000" cy="5143500"/>
   <p:notesSz cx="5143500" cy="9144000"/>
@@ -979,6 +983,358 @@
             <a:fld id="{F7021451-1387-4CA6-816F-3879F97B5CBC}" type="slidenum">
               <a:rPr lang="en-US"/>
               <a:t>14</a:t>
+            </a:fld>
+            <a:endParaRPr lang="en-US"/>
+          </a:p>
+        </p:txBody>
+      </p:sp>
+    </p:spTree>
+    <p:extLst>
+      <p:ext uri="{BB962C8B-B14F-4D97-AF65-F5344CB8AC3E}">
+        <p14:creationId xmlns:p14="http://schemas.microsoft.com/office/powerpoint/2010/main" val="1024086991"/>
+      </p:ext>
+    </p:extLst>
+  </p:cSld>
+  <p:clrMapOvr>
+    <a:masterClrMapping/>
+  </p:clrMapOvr>
+</p:notes>
+</file>
+
+<file path=ppt/notesSlides/notesSlide15.xml><?xml version="1.0" encoding="utf-8"?>
+<p:notes xmlns:a="http://schemas.openxmlformats.org/drawingml/2006/main" xmlns:r="http://schemas.openxmlformats.org/officeDocument/2006/relationships" xmlns:p="http://schemas.openxmlformats.org/presentationml/2006/main">
+  <p:cSld>
+    <p:spTree>
+      <p:nvGrpSpPr>
+        <p:cNvPr id="1" name=""/>
+        <p:cNvGrpSpPr/>
+        <p:nvPr/>
+      </p:nvGrpSpPr>
+      <p:grpSpPr>
+        <a:xfrm>
+          <a:off x="0" y="0"/>
+          <a:ext cx="0" cy="0"/>
+          <a:chOff x="0" y="0"/>
+          <a:chExt cx="0" cy="0"/>
+        </a:xfrm>
+      </p:grpSpPr>
+      <p:sp>
+        <p:nvSpPr>
+          <p:cNvPr id="2" name="Slide Image Placeholder 1"/>
+          <p:cNvSpPr>
+            <a:spLocks noGrp="1" noRot="1" noChangeAspect="1"/>
+          </p:cNvSpPr>
+          <p:nvPr>
+            <p:ph type="sldImg"/>
+          </p:nvPr>
+        </p:nvSpPr>
+        <p:spPr/>
+      </p:sp>
+      <p:sp>
+        <p:nvSpPr>
+          <p:cNvPr id="3" name="Notes Placeholder 2"/>
+          <p:cNvSpPr>
+            <a:spLocks noGrp="1"/>
+          </p:cNvSpPr>
+          <p:nvPr>
+            <p:ph type="body" idx="1"/>
+          </p:nvPr>
+        </p:nvSpPr>
+        <p:spPr/>
+        <p:txBody>
+          <a:bodyPr/>
+          <a:lstStyle/>
+          <a:p>
+            <a:r>
+              <a:rPr lang="en-US" dirty="0"/>
+              <a:t/>
+            </a:r>
+            <a:endParaRPr lang="en-US" dirty="0"/>
+          </a:p>
+        </p:txBody>
+      </p:sp>
+      <p:sp>
+        <p:nvSpPr>
+          <p:cNvPr id="4" name="Slide Number Placeholder 3"/>
+          <p:cNvSpPr>
+            <a:spLocks noGrp="1"/>
+          </p:cNvSpPr>
+          <p:nvPr>
+            <p:ph type="sldNum" sz="quarter" idx="10"/>
+          </p:nvPr>
+        </p:nvSpPr>
+        <p:spPr/>
+        <p:txBody>
+          <a:bodyPr/>
+          <a:lstStyle/>
+          <a:p>
+            <a:fld id="{F7021451-1387-4CA6-816F-3879F97B5CBC}" type="slidenum">
+              <a:rPr lang="en-US"/>
+              <a:t>15</a:t>
+            </a:fld>
+            <a:endParaRPr lang="en-US"/>
+          </a:p>
+        </p:txBody>
+      </p:sp>
+    </p:spTree>
+    <p:extLst>
+      <p:ext uri="{BB962C8B-B14F-4D97-AF65-F5344CB8AC3E}">
+        <p14:creationId xmlns:p14="http://schemas.microsoft.com/office/powerpoint/2010/main" val="1024086991"/>
+      </p:ext>
+    </p:extLst>
+  </p:cSld>
+  <p:clrMapOvr>
+    <a:masterClrMapping/>
+  </p:clrMapOvr>
+</p:notes>
+</file>
+
+<file path=ppt/notesSlides/notesSlide16.xml><?xml version="1.0" encoding="utf-8"?>
+<p:notes xmlns:a="http://schemas.openxmlformats.org/drawingml/2006/main" xmlns:r="http://schemas.openxmlformats.org/officeDocument/2006/relationships" xmlns:p="http://schemas.openxmlformats.org/presentationml/2006/main">
+  <p:cSld>
+    <p:spTree>
+      <p:nvGrpSpPr>
+        <p:cNvPr id="1" name=""/>
+        <p:cNvGrpSpPr/>
+        <p:nvPr/>
+      </p:nvGrpSpPr>
+      <p:grpSpPr>
+        <a:xfrm>
+          <a:off x="0" y="0"/>
+          <a:ext cx="0" cy="0"/>
+          <a:chOff x="0" y="0"/>
+          <a:chExt cx="0" cy="0"/>
+        </a:xfrm>
+      </p:grpSpPr>
+      <p:sp>
+        <p:nvSpPr>
+          <p:cNvPr id="2" name="Slide Image Placeholder 1"/>
+          <p:cNvSpPr>
+            <a:spLocks noGrp="1" noRot="1" noChangeAspect="1"/>
+          </p:cNvSpPr>
+          <p:nvPr>
+            <p:ph type="sldImg"/>
+          </p:nvPr>
+        </p:nvSpPr>
+        <p:spPr/>
+      </p:sp>
+      <p:sp>
+        <p:nvSpPr>
+          <p:cNvPr id="3" name="Notes Placeholder 2"/>
+          <p:cNvSpPr>
+            <a:spLocks noGrp="1"/>
+          </p:cNvSpPr>
+          <p:nvPr>
+            <p:ph type="body" idx="1"/>
+          </p:nvPr>
+        </p:nvSpPr>
+        <p:spPr/>
+        <p:txBody>
+          <a:bodyPr/>
+          <a:lstStyle/>
+          <a:p>
+            <a:r>
+              <a:rPr lang="en-US" dirty="0"/>
+              <a:t/>
+            </a:r>
+            <a:endParaRPr lang="en-US" dirty="0"/>
+          </a:p>
+        </p:txBody>
+      </p:sp>
+      <p:sp>
+        <p:nvSpPr>
+          <p:cNvPr id="4" name="Slide Number Placeholder 3"/>
+          <p:cNvSpPr>
+            <a:spLocks noGrp="1"/>
+          </p:cNvSpPr>
+          <p:nvPr>
+            <p:ph type="sldNum" sz="quarter" idx="10"/>
+          </p:nvPr>
+        </p:nvSpPr>
+        <p:spPr/>
+        <p:txBody>
+          <a:bodyPr/>
+          <a:lstStyle/>
+          <a:p>
+            <a:fld id="{F7021451-1387-4CA6-816F-3879F97B5CBC}" type="slidenum">
+              <a:rPr lang="en-US"/>
+              <a:t>16</a:t>
+            </a:fld>
+            <a:endParaRPr lang="en-US"/>
+          </a:p>
+        </p:txBody>
+      </p:sp>
+    </p:spTree>
+    <p:extLst>
+      <p:ext uri="{BB962C8B-B14F-4D97-AF65-F5344CB8AC3E}">
+        <p14:creationId xmlns:p14="http://schemas.microsoft.com/office/powerpoint/2010/main" val="1024086991"/>
+      </p:ext>
+    </p:extLst>
+  </p:cSld>
+  <p:clrMapOvr>
+    <a:masterClrMapping/>
+  </p:clrMapOvr>
+</p:notes>
+</file>
+
+<file path=ppt/notesSlides/notesSlide17.xml><?xml version="1.0" encoding="utf-8"?>
+<p:notes xmlns:a="http://schemas.openxmlformats.org/drawingml/2006/main" xmlns:r="http://schemas.openxmlformats.org/officeDocument/2006/relationships" xmlns:p="http://schemas.openxmlformats.org/presentationml/2006/main">
+  <p:cSld>
+    <p:spTree>
+      <p:nvGrpSpPr>
+        <p:cNvPr id="1" name=""/>
+        <p:cNvGrpSpPr/>
+        <p:nvPr/>
+      </p:nvGrpSpPr>
+      <p:grpSpPr>
+        <a:xfrm>
+          <a:off x="0" y="0"/>
+          <a:ext cx="0" cy="0"/>
+          <a:chOff x="0" y="0"/>
+          <a:chExt cx="0" cy="0"/>
+        </a:xfrm>
+      </p:grpSpPr>
+      <p:sp>
+        <p:nvSpPr>
+          <p:cNvPr id="2" name="Slide Image Placeholder 1"/>
+          <p:cNvSpPr>
+            <a:spLocks noGrp="1" noRot="1" noChangeAspect="1"/>
+          </p:cNvSpPr>
+          <p:nvPr>
+            <p:ph type="sldImg"/>
+          </p:nvPr>
+        </p:nvSpPr>
+        <p:spPr/>
+      </p:sp>
+      <p:sp>
+        <p:nvSpPr>
+          <p:cNvPr id="3" name="Notes Placeholder 2"/>
+          <p:cNvSpPr>
+            <a:spLocks noGrp="1"/>
+          </p:cNvSpPr>
+          <p:nvPr>
+            <p:ph type="body" idx="1"/>
+          </p:nvPr>
+        </p:nvSpPr>
+        <p:spPr/>
+        <p:txBody>
+          <a:bodyPr/>
+          <a:lstStyle/>
+          <a:p>
+            <a:r>
+              <a:rPr lang="en-US" dirty="0"/>
+              <a:t/>
+            </a:r>
+            <a:endParaRPr lang="en-US" dirty="0"/>
+          </a:p>
+        </p:txBody>
+      </p:sp>
+      <p:sp>
+        <p:nvSpPr>
+          <p:cNvPr id="4" name="Slide Number Placeholder 3"/>
+          <p:cNvSpPr>
+            <a:spLocks noGrp="1"/>
+          </p:cNvSpPr>
+          <p:nvPr>
+            <p:ph type="sldNum" sz="quarter" idx="10"/>
+          </p:nvPr>
+        </p:nvSpPr>
+        <p:spPr/>
+        <p:txBody>
+          <a:bodyPr/>
+          <a:lstStyle/>
+          <a:p>
+            <a:fld id="{F7021451-1387-4CA6-816F-3879F97B5CBC}" type="slidenum">
+              <a:rPr lang="en-US"/>
+              <a:t>17</a:t>
+            </a:fld>
+            <a:endParaRPr lang="en-US"/>
+          </a:p>
+        </p:txBody>
+      </p:sp>
+    </p:spTree>
+    <p:extLst>
+      <p:ext uri="{BB962C8B-B14F-4D97-AF65-F5344CB8AC3E}">
+        <p14:creationId xmlns:p14="http://schemas.microsoft.com/office/powerpoint/2010/main" val="1024086991"/>
+      </p:ext>
+    </p:extLst>
+  </p:cSld>
+  <p:clrMapOvr>
+    <a:masterClrMapping/>
+  </p:clrMapOvr>
+</p:notes>
+</file>
+
+<file path=ppt/notesSlides/notesSlide18.xml><?xml version="1.0" encoding="utf-8"?>
+<p:notes xmlns:a="http://schemas.openxmlformats.org/drawingml/2006/main" xmlns:r="http://schemas.openxmlformats.org/officeDocument/2006/relationships" xmlns:p="http://schemas.openxmlformats.org/presentationml/2006/main">
+  <p:cSld>
+    <p:spTree>
+      <p:nvGrpSpPr>
+        <p:cNvPr id="1" name=""/>
+        <p:cNvGrpSpPr/>
+        <p:nvPr/>
+      </p:nvGrpSpPr>
+      <p:grpSpPr>
+        <a:xfrm>
+          <a:off x="0" y="0"/>
+          <a:ext cx="0" cy="0"/>
+          <a:chOff x="0" y="0"/>
+          <a:chExt cx="0" cy="0"/>
+        </a:xfrm>
+      </p:grpSpPr>
+      <p:sp>
+        <p:nvSpPr>
+          <p:cNvPr id="2" name="Slide Image Placeholder 1"/>
+          <p:cNvSpPr>
+            <a:spLocks noGrp="1" noRot="1" noChangeAspect="1"/>
+          </p:cNvSpPr>
+          <p:nvPr>
+            <p:ph type="sldImg"/>
+          </p:nvPr>
+        </p:nvSpPr>
+        <p:spPr/>
+      </p:sp>
+      <p:sp>
+        <p:nvSpPr>
+          <p:cNvPr id="3" name="Notes Placeholder 2"/>
+          <p:cNvSpPr>
+            <a:spLocks noGrp="1"/>
+          </p:cNvSpPr>
+          <p:nvPr>
+            <p:ph type="body" idx="1"/>
+          </p:nvPr>
+        </p:nvSpPr>
+        <p:spPr/>
+        <p:txBody>
+          <a:bodyPr/>
+          <a:lstStyle/>
+          <a:p>
+            <a:r>
+              <a:rPr lang="en-US" dirty="0"/>
+              <a:t/>
+            </a:r>
+            <a:endParaRPr lang="en-US" dirty="0"/>
+          </a:p>
+        </p:txBody>
+      </p:sp>
+      <p:sp>
+        <p:nvSpPr>
+          <p:cNvPr id="4" name="Slide Number Placeholder 3"/>
+          <p:cNvSpPr>
+            <a:spLocks noGrp="1"/>
+          </p:cNvSpPr>
+          <p:nvPr>
+            <p:ph type="sldNum" sz="quarter" idx="10"/>
+          </p:nvPr>
+        </p:nvSpPr>
+        <p:spPr/>
+        <p:txBody>
+          <a:bodyPr/>
+          <a:lstStyle/>
+          <a:p>
+            <a:fld id="{F7021451-1387-4CA6-816F-3879F97B5CBC}" type="slidenum">
+              <a:rPr lang="en-US"/>
+              <a:t>18</a:t>
             </a:fld>
             <a:endParaRPr lang="en-US"/>
           </a:p>
@@ -2278,102 +2634,6 @@
         </p:nvSpPr>
         <p:spPr>
           <a:xfrm>
-            <a:off x="406301" y="1574453"/>
-            <a:ext cx="8498026" cy="274290"/>
-          </a:xfrm>
-          <a:prstGeom prst="rect">
-            <a:avLst/>
-          </a:prstGeom>
-          <a:noFill/>
-          <a:ln/>
-        </p:spPr>
-        <p:txBody>
-          <a:bodyPr wrap="square" lIns="0" tIns="0" rIns="0" bIns="0" rtlCol="0" anchor="t"/>
-          <a:lstStyle/>
-          <a:p>
-            <a:pPr algn="l" indent="0" marL="0">
-              <a:lnSpc>
-                <a:spcPts val="2160"/>
-              </a:lnSpc>
-              <a:spcBef>
-                <a:spcPts val="600"/>
-              </a:spcBef>
-              <a:spcAft>
-                <a:spcPts val="800"/>
-              </a:spcAft>
-              <a:buNone/>
-            </a:pPr>
-            <a:r>
-              <a:rPr lang="en-US" sz="1800" b="1" dirty="0">
-                <a:solidFill>
-                  <a:srgbClr val="FE4447"/>
-                </a:solidFill>
-                <a:latin typeface="Georgia" pitchFamily="34" charset="0"/>
-                <a:ea typeface="Georgia" pitchFamily="34" charset="-122"/>
-                <a:cs typeface="Georgia" pitchFamily="34" charset="-120"/>
-              </a:rPr>
-              <a:t>Learning objective</a:t>
-            </a:r>
-            <a:endParaRPr lang="en-US" sz="1800" dirty="0"/>
-          </a:p>
-        </p:txBody>
-      </p:sp>
-      <p:sp>
-        <p:nvSpPr>
-          <p:cNvPr id="6" name="Text 4"/>
-          <p:cNvSpPr/>
-          <p:nvPr/>
-        </p:nvSpPr>
-        <p:spPr>
-          <a:xfrm>
-            <a:off x="406301" y="1988344"/>
-            <a:ext cx="8498026" cy="426541"/>
-          </a:xfrm>
-          <a:prstGeom prst="rect">
-            <a:avLst/>
-          </a:prstGeom>
-          <a:noFill/>
-          <a:ln/>
-        </p:spPr>
-        <p:txBody>
-          <a:bodyPr wrap="square" lIns="0" tIns="0" rIns="0" bIns="0" rtlCol="0" anchor="t"/>
-          <a:lstStyle/>
-          <a:p>
-            <a:pPr algn="l" indent="0" marL="0">
-              <a:lnSpc>
-                <a:spcPts val="1680"/>
-              </a:lnSpc>
-              <a:spcBef>
-                <a:spcPts val="300"/>
-              </a:spcBef>
-              <a:spcAft>
-                <a:spcPts val="300"/>
-              </a:spcAft>
-              <a:buNone/>
-            </a:pPr>
-            <a:r>
-              <a:rPr lang="en-US" sz="1200" dirty="0">
-                <a:solidFill>
-                  <a:srgbClr val="1C2833"/>
-                </a:solidFill>
-                <a:latin typeface="Arial" pitchFamily="34" charset="0"/>
-                <a:ea typeface="Arial" pitchFamily="34" charset="-122"/>
-                <a:cs typeface="Arial" pitchFamily="34" charset="-120"/>
-              </a:rPr>
-              <a:t>By the end of this lesson, students will perform 2 rounds of Sūrya Namaskāra with breath co-ordination (inhale on opening poses, exhale on folding/closing poses), and submit a project plan.</a:t>
-            </a:r>
-            <a:endParaRPr lang="en-US" sz="1200" dirty="0"/>
-          </a:p>
-        </p:txBody>
-      </p:sp>
-      <p:sp>
-        <p:nvSpPr>
-          <p:cNvPr id="7" name="Text 5"/>
-          <p:cNvSpPr/>
-          <p:nvPr/>
-        </p:nvSpPr>
-        <p:spPr>
-          <a:xfrm>
             <a:off x="406301" y="4434929"/>
             <a:ext cx="8498026" cy="213271"/>
           </a:xfrm>
@@ -2518,7 +2778,7 @@
                 <a:ea typeface="Georgia" pitchFamily="34" charset="-122"/>
                 <a:cs typeface="Georgia" pitchFamily="34" charset="-120"/>
               </a:rPr>
-              <a:t>Student-facing content</a:t>
+              <a:t>Practice (15 min) — 2 rounds with breath (cont.)</a:t>
             </a:r>
             <a:endParaRPr lang="en-US" sz="1800" dirty="0"/>
           </a:p>
@@ -2532,61 +2792,8 @@
         </p:nvSpPr>
         <p:spPr>
           <a:xfrm>
-            <a:off x="406301" y="883593"/>
-            <a:ext cx="8331398" cy="2381250"/>
-          </a:xfrm>
-          <a:prstGeom prst="rect">
-            <a:avLst/>
-          </a:prstGeom>
-          <a:solidFill>
-            <a:srgbClr val="F4F8F9"/>
-          </a:solidFill>
-          <a:ln/>
-        </p:spPr>
-        <p:txBody>
-          <a:bodyPr wrap="square" rtlCol="0" anchor="ctr"/>
-          <a:lstStyle/>
-          <a:p>
-            <a:pPr indent="0" marL="0">
-              <a:buNone/>
-            </a:pPr>
-            <a:endParaRPr lang="en-US" dirty="0"/>
-          </a:p>
-        </p:txBody>
-      </p:sp>
-      <p:sp>
-        <p:nvSpPr>
-          <p:cNvPr id="5" name="Shape 3"/>
-          <p:cNvSpPr/>
-          <p:nvPr/>
-        </p:nvSpPr>
-        <p:spPr>
-          <a:xfrm>
-            <a:off x="434876" y="883593"/>
-            <a:ext cx="0" cy="2381250"/>
-          </a:xfrm>
-          <a:prstGeom prst="line">
-            <a:avLst/>
-          </a:prstGeom>
-          <a:noFill/>
-          <a:ln w="57150">
-            <a:solidFill>
-              <a:srgbClr val="FE4447"/>
-            </a:solidFill>
-            <a:prstDash val="solid"/>
-          </a:ln>
-        </p:spPr>
-      </p:sp>
-      <p:sp>
-        <p:nvSpPr>
-          <p:cNvPr id="6" name="Text 4"/>
-          <p:cNvSpPr/>
-          <p:nvPr/>
-        </p:nvSpPr>
-        <p:spPr>
-          <a:xfrm>
-            <a:off x="692051" y="1074093"/>
-            <a:ext cx="7973389" cy="230981"/>
+            <a:off x="406301" y="870942"/>
+            <a:ext cx="8498026" cy="426541"/>
           </a:xfrm>
           <a:prstGeom prst="rect">
             <a:avLst/>
@@ -2600,7 +2807,7 @@
           <a:p>
             <a:pPr algn="l" indent="0" marL="0">
               <a:lnSpc>
-                <a:spcPts val="1820"/>
+                <a:spcPts val="1680"/>
               </a:lnSpc>
               <a:spcBef>
                 <a:spcPts val="300"/>
@@ -2611,44 +2818,19 @@
               <a:buNone/>
             </a:pPr>
             <a:r>
-              <a:rPr lang="en-US" sz="1300" b="1" i="1" dirty="0">
-                <a:solidFill>
-                  <a:srgbClr val="1C2833"/>
-                </a:solidFill>
-                <a:latin typeface="Georgia" pitchFamily="34" charset="0"/>
-                <a:ea typeface="Georgia" pitchFamily="34" charset="-122"/>
-                <a:cs typeface="Georgia" pitchFamily="34" charset="-120"/>
-              </a:rPr>
-              <a:t>Sūrya Namaskāra — with breath</a:t>
-            </a:r>
-            <a:endParaRPr lang="en-US" sz="1300" dirty="0"/>
-          </a:p>
-        </p:txBody>
-      </p:sp>
-      <p:sp>
-        <p:nvSpPr>
-          <p:cNvPr id="7" name="Text 5"/>
-          <p:cNvSpPr/>
-          <p:nvPr/>
-        </p:nvSpPr>
-        <p:spPr>
-          <a:xfrm>
-            <a:off x="692051" y="1343174"/>
-            <a:ext cx="7973389" cy="230981"/>
-          </a:xfrm>
-          <a:prstGeom prst="rect">
-            <a:avLst/>
-          </a:prstGeom>
-          <a:noFill/>
-          <a:ln/>
-        </p:spPr>
-        <p:txBody>
-          <a:bodyPr wrap="square" lIns="0" tIns="0" rIns="0" bIns="0" rtlCol="0" anchor="t"/>
-          <a:lstStyle/>
-          <a:p>
-            <a:pPr algn="l" indent="0" marL="0">
-              <a:lnSpc>
-                <a:spcPts val="1820"/>
+              <a:rPr lang="en-US" sz="1200" dirty="0">
+                <a:solidFill>
+                  <a:srgbClr val="1C2833"/>
+                </a:solidFill>
+                <a:latin typeface="Arial" pitchFamily="34" charset="0"/>
+                <a:ea typeface="Arial" pitchFamily="34" charset="-122"/>
+                <a:cs typeface="Arial" pitchFamily="34" charset="-120"/>
+              </a:rPr>
+              <a:t>After the rounds, students lie in </a:t>
+            </a:r>
+            <a:pPr algn="l" indent="0" marL="0">
+              <a:lnSpc>
+                <a:spcPts val="1680"/>
               </a:lnSpc>
               <a:spcBef>
                 <a:spcPts val="300"/>
@@ -2659,19 +2841,19 @@
               <a:buNone/>
             </a:pPr>
             <a:r>
-              <a:rPr lang="en-US" sz="1300" dirty="0">
-                <a:solidFill>
-                  <a:srgbClr val="1C2833"/>
-                </a:solidFill>
-                <a:latin typeface="Georgia" pitchFamily="34" charset="0"/>
-                <a:ea typeface="Georgia" pitchFamily="34" charset="-122"/>
-                <a:cs typeface="Georgia" pitchFamily="34" charset="-120"/>
-              </a:rPr>
-              <a:t>Pattern: </a:t>
-            </a:r>
-            <a:pPr algn="l" indent="0" marL="0">
-              <a:lnSpc>
-                <a:spcPts val="1820"/>
+              <a:rPr lang="en-US" sz="1200" i="1" dirty="0">
+                <a:solidFill>
+                  <a:srgbClr val="1C2833"/>
+                </a:solidFill>
+                <a:latin typeface="Arial" pitchFamily="34" charset="0"/>
+                <a:ea typeface="Arial" pitchFamily="34" charset="-122"/>
+                <a:cs typeface="Arial" pitchFamily="34" charset="-120"/>
+              </a:rPr>
+              <a:t>śavāsana</a:t>
+            </a:r>
+            <a:pPr algn="l" indent="0" marL="0">
+              <a:lnSpc>
+                <a:spcPts val="1680"/>
               </a:lnSpc>
               <a:spcBef>
                 <a:spcPts val="300"/>
@@ -2682,236 +2864,23 @@
               <a:buNone/>
             </a:pPr>
             <a:r>
-              <a:rPr lang="en-US" sz="1300" b="1" i="1" dirty="0">
-                <a:solidFill>
-                  <a:srgbClr val="1C2833"/>
-                </a:solidFill>
-                <a:latin typeface="Georgia" pitchFamily="34" charset="0"/>
-                <a:ea typeface="Georgia" pitchFamily="34" charset="-122"/>
-                <a:cs typeface="Georgia" pitchFamily="34" charset="-120"/>
-              </a:rPr>
-              <a:t>open body = inhale, fold body = exhale.</a:t>
-            </a:r>
-            <a:endParaRPr lang="en-US" sz="1300" dirty="0"/>
-          </a:p>
-        </p:txBody>
-      </p:sp>
-      <p:sp>
-        <p:nvSpPr>
-          <p:cNvPr id="8" name="Text 6"/>
-          <p:cNvSpPr/>
-          <p:nvPr/>
-        </p:nvSpPr>
-        <p:spPr>
-          <a:xfrm>
-            <a:off x="692051" y="1612255"/>
-            <a:ext cx="7973389" cy="230981"/>
-          </a:xfrm>
-          <a:prstGeom prst="rect">
-            <a:avLst/>
-          </a:prstGeom>
-          <a:noFill/>
-          <a:ln/>
-        </p:spPr>
-        <p:txBody>
-          <a:bodyPr wrap="square" lIns="0" tIns="0" rIns="0" bIns="0" rtlCol="0" anchor="t"/>
-          <a:lstStyle/>
-          <a:p>
-            <a:pPr algn="l" indent="0" marL="0">
-              <a:lnSpc>
-                <a:spcPts val="1820"/>
-              </a:lnSpc>
-              <a:spcBef>
-                <a:spcPts val="300"/>
-              </a:spcBef>
-              <a:spcAft>
-                <a:spcPts val="300"/>
-              </a:spcAft>
-              <a:buNone/>
-            </a:pPr>
-            <a:r>
-              <a:rPr lang="en-US" sz="1300" dirty="0">
-                <a:solidFill>
-                  <a:srgbClr val="1C2833"/>
-                </a:solidFill>
-                <a:latin typeface="Georgia" pitchFamily="34" charset="0"/>
-                <a:ea typeface="Georgia" pitchFamily="34" charset="-122"/>
-                <a:cs typeface="Georgia" pitchFamily="34" charset="-120"/>
-              </a:rPr>
-              <a:t>Maximum 2–3 rounds today. After the rounds, </a:t>
-            </a:r>
-            <a:pPr algn="l" indent="0" marL="0">
-              <a:lnSpc>
-                <a:spcPts val="1820"/>
-              </a:lnSpc>
-              <a:spcBef>
-                <a:spcPts val="300"/>
-              </a:spcBef>
-              <a:spcAft>
-                <a:spcPts val="300"/>
-              </a:spcAft>
-              <a:buNone/>
-            </a:pPr>
-            <a:r>
-              <a:rPr lang="en-US" sz="1300" i="1" dirty="0">
-                <a:solidFill>
-                  <a:srgbClr val="1C2833"/>
-                </a:solidFill>
-                <a:latin typeface="Georgia" pitchFamily="34" charset="0"/>
-                <a:ea typeface="Georgia" pitchFamily="34" charset="-122"/>
-                <a:cs typeface="Georgia" pitchFamily="34" charset="-120"/>
-              </a:rPr>
-              <a:t>śavāsana</a:t>
-            </a:r>
-            <a:pPr algn="l" indent="0" marL="0">
-              <a:lnSpc>
-                <a:spcPts val="1820"/>
-              </a:lnSpc>
-              <a:spcBef>
-                <a:spcPts val="300"/>
-              </a:spcBef>
-              <a:spcAft>
-                <a:spcPts val="300"/>
-              </a:spcAft>
-              <a:buNone/>
-            </a:pPr>
-            <a:r>
-              <a:rPr lang="en-US" sz="1300" dirty="0">
-                <a:solidFill>
-                  <a:srgbClr val="1C2833"/>
-                </a:solidFill>
-                <a:latin typeface="Georgia" pitchFamily="34" charset="0"/>
-                <a:ea typeface="Georgia" pitchFamily="34" charset="-122"/>
-                <a:cs typeface="Georgia" pitchFamily="34" charset="-120"/>
-              </a:rPr>
-              <a:t> (lie down, rest) for 2 minutes.</a:t>
-            </a:r>
-            <a:endParaRPr lang="en-US" sz="1300" dirty="0"/>
-          </a:p>
-        </p:txBody>
-      </p:sp>
-      <p:sp>
-        <p:nvSpPr>
-          <p:cNvPr id="9" name="Text 7"/>
-          <p:cNvSpPr/>
-          <p:nvPr/>
-        </p:nvSpPr>
-        <p:spPr>
-          <a:xfrm>
-            <a:off x="692051" y="1881336"/>
-            <a:ext cx="7973389" cy="230981"/>
-          </a:xfrm>
-          <a:prstGeom prst="rect">
-            <a:avLst/>
-          </a:prstGeom>
-          <a:noFill/>
-          <a:ln/>
-        </p:spPr>
-        <p:txBody>
-          <a:bodyPr wrap="square" lIns="0" tIns="0" rIns="0" bIns="0" rtlCol="0" anchor="t"/>
-          <a:lstStyle/>
-          <a:p>
-            <a:pPr algn="l" indent="0" marL="0">
-              <a:lnSpc>
-                <a:spcPts val="1820"/>
-              </a:lnSpc>
-              <a:spcBef>
-                <a:spcPts val="300"/>
-              </a:spcBef>
-              <a:spcAft>
-                <a:spcPts val="300"/>
-              </a:spcAft>
-              <a:buNone/>
-            </a:pPr>
-            <a:r>
-              <a:rPr lang="en-US" sz="1300" b="1" i="1" dirty="0">
-                <a:solidFill>
-                  <a:srgbClr val="1C2833"/>
-                </a:solidFill>
-                <a:latin typeface="Georgia" pitchFamily="34" charset="0"/>
-                <a:ea typeface="Georgia" pitchFamily="34" charset="-122"/>
-                <a:cs typeface="Georgia" pitchFamily="34" charset="-120"/>
-              </a:rPr>
-              <a:t>Project (Days 8–10):</a:t>
-            </a:r>
-            <a:pPr algn="l" indent="0" marL="0">
-              <a:lnSpc>
-                <a:spcPts val="1820"/>
-              </a:lnSpc>
-              <a:spcBef>
-                <a:spcPts val="300"/>
-              </a:spcBef>
-              <a:spcAft>
-                <a:spcPts val="300"/>
-              </a:spcAft>
-              <a:buNone/>
-            </a:pPr>
-            <a:r>
-              <a:rPr lang="en-US" sz="1300" dirty="0">
-                <a:solidFill>
-                  <a:srgbClr val="1C2833"/>
-                </a:solidFill>
-                <a:latin typeface="Georgia" pitchFamily="34" charset="0"/>
-                <a:ea typeface="Georgia" pitchFamily="34" charset="-122"/>
-                <a:cs typeface="Georgia" pitchFamily="34" charset="-120"/>
-              </a:rPr>
-              <a:t> Design a 5-minute yoga routine for ONE audience. Pick today:</a:t>
-            </a:r>
-            <a:endParaRPr lang="en-US" sz="1300" dirty="0"/>
-          </a:p>
-        </p:txBody>
-      </p:sp>
-      <p:sp>
-        <p:nvSpPr>
-          <p:cNvPr id="10" name="Text 8"/>
-          <p:cNvSpPr/>
-          <p:nvPr/>
-        </p:nvSpPr>
-        <p:spPr>
-          <a:xfrm>
-            <a:off x="692051" y="2150418"/>
-            <a:ext cx="7973389" cy="923925"/>
-          </a:xfrm>
-          <a:prstGeom prst="rect">
-            <a:avLst/>
-          </a:prstGeom>
-          <a:noFill/>
-          <a:ln/>
-        </p:spPr>
-        <p:txBody>
-          <a:bodyPr wrap="square" lIns="0" tIns="0" rIns="0" bIns="0" rtlCol="0" anchor="t"/>
-          <a:lstStyle/>
-          <a:p>
-            <a:pPr algn="l" indent="0" marL="0">
-              <a:lnSpc>
-                <a:spcPts val="1820"/>
-              </a:lnSpc>
-              <a:spcBef>
-                <a:spcPts val="300"/>
-              </a:spcBef>
-              <a:spcAft>
-                <a:spcPts val="300"/>
-              </a:spcAft>
-              <a:buNone/>
-            </a:pPr>
-            <a:r>
-              <a:rPr lang="en-US" sz="1300" i="1" dirty="0">
-                <a:solidFill>
-                  <a:srgbClr val="1C2833"/>
-                </a:solidFill>
-                <a:latin typeface="Georgia" pitchFamily="34" charset="0"/>
-                <a:ea typeface="Georgia" pitchFamily="34" charset="-122"/>
-                <a:cs typeface="Georgia" pitchFamily="34" charset="-120"/>
-              </a:rPr>
-              <a:t>| Audience | Examples of fitting āsanas | |----------|------------------------------| | Peers (your classmates) | Energising — standing poses, partial SN | | Parents | Relaxing — child's pose, seated stretches | | Younger siblings | Playful — animal poses (cat, cobra, downward dog) | | Pre-exam stress | Calming — child's pose, seated breath |</a:t>
-            </a:r>
-            <a:endParaRPr lang="en-US" sz="1300" dirty="0"/>
-          </a:p>
-        </p:txBody>
-      </p:sp>
-      <p:sp>
-        <p:nvSpPr>
-          <p:cNvPr id="11" name="Text 9"/>
+              <a:rPr lang="en-US" sz="1200" dirty="0">
+                <a:solidFill>
+                  <a:srgbClr val="1C2833"/>
+                </a:solidFill>
+                <a:latin typeface="Arial" pitchFamily="34" charset="0"/>
+                <a:ea typeface="Arial" pitchFamily="34" charset="-122"/>
+                <a:cs typeface="Arial" pitchFamily="34" charset="-120"/>
+              </a:rPr>
+              <a:t> (corpse pose — flat on the back, arms slightly out, palms up) for 2 minutes to integrate.</a:t>
+            </a:r>
+            <a:endParaRPr lang="en-US" sz="1200" dirty="0"/>
+          </a:p>
+        </p:txBody>
+      </p:sp>
+      <p:sp>
+        <p:nvSpPr>
+          <p:cNvPr id="5" name="Text 3"/>
           <p:cNvSpPr/>
           <p:nvPr/>
         </p:nvSpPr>
@@ -3061,7 +3030,7 @@
                 <a:ea typeface="Georgia" pitchFamily="34" charset="-122"/>
                 <a:cs typeface="Georgia" pitchFamily="34" charset="-120"/>
               </a:rPr>
-              <a:t>Homework</a:t>
+              <a:t>Mid-module formative quiz (15 min)</a:t>
             </a:r>
             <a:endParaRPr lang="en-US" sz="1800" dirty="0"/>
           </a:p>
@@ -3075,8 +3044,8 @@
         </p:nvSpPr>
         <p:spPr>
           <a:xfrm>
-            <a:off x="406301" y="870942"/>
-            <a:ext cx="8498026" cy="213271"/>
+            <a:off x="634901" y="883593"/>
+            <a:ext cx="8102798" cy="750391"/>
           </a:xfrm>
           <a:prstGeom prst="rect">
             <a:avLst/>
@@ -3088,17 +3057,15 @@
           <a:bodyPr wrap="square" lIns="0" tIns="0" rIns="0" bIns="0" rtlCol="0" anchor="t"/>
           <a:lstStyle/>
           <a:p>
-            <a:pPr algn="l" indent="0" marL="0">
-              <a:lnSpc>
-                <a:spcPts val="1680"/>
-              </a:lnSpc>
-              <a:spcBef>
-                <a:spcPts val="300"/>
-              </a:spcBef>
-              <a:spcAft>
-                <a:spcPts val="300"/>
-              </a:spcAft>
-              <a:buNone/>
+            <a:pPr algn="l" marL="342900" indent="-342900">
+              <a:lnSpc>
+                <a:spcPts val="1620"/>
+              </a:lnSpc>
+              <a:spcAft>
+                <a:spcPts val="300"/>
+              </a:spcAft>
+              <a:buSzPct val="100000"/>
+              <a:buChar char="•"/>
             </a:pPr>
             <a:r>
               <a:rPr lang="en-US" sz="1200" dirty="0">
@@ -3109,7 +3076,71 @@
                 <a:ea typeface="Arial" pitchFamily="34" charset="-122"/>
                 <a:cs typeface="Arial" pitchFamily="34" charset="-120"/>
               </a:rPr>
-              <a:t>– 1 round of Sūrya Namaskāra at home with breath co-ordination. – Submit your project plan paragraph by tomorrow.</a:t>
+              <a:t>Hand out </a:t>
+            </a:r>
+            <a:pPr algn="l" indent="0" marL="0">
+              <a:lnSpc>
+                <a:spcPts val="1620"/>
+              </a:lnSpc>
+              <a:spcAft>
+                <a:spcPts val="300"/>
+              </a:spcAft>
+              <a:buNone/>
+            </a:pPr>
+            <a:r>
+              <a:rPr lang="en-US" sz="1200" dirty="0">
+                <a:solidFill>
+                  <a:srgbClr val="1C2833"/>
+                </a:solidFill>
+                <a:latin typeface="Arial" pitchFamily="34" charset="0"/>
+                <a:ea typeface="Arial" pitchFamily="34" charset="-122"/>
+                <a:cs typeface="Arial" pitchFamily="34" charset="-120"/>
+              </a:rPr>
+              <a:t>quizzes/formative.md</a:t>
+            </a:r>
+            <a:pPr algn="l" indent="0" marL="0">
+              <a:lnSpc>
+                <a:spcPts val="1620"/>
+              </a:lnSpc>
+              <a:spcAft>
+                <a:spcPts val="300"/>
+              </a:spcAft>
+              <a:buNone/>
+            </a:pPr>
+            <a:r>
+              <a:rPr lang="en-US" sz="1200" dirty="0">
+                <a:solidFill>
+                  <a:srgbClr val="1C2833"/>
+                </a:solidFill>
+                <a:latin typeface="Arial" pitchFamily="34" charset="0"/>
+                <a:ea typeface="Arial" pitchFamily="34" charset="-122"/>
+                <a:cs typeface="Arial" pitchFamily="34" charset="-120"/>
+              </a:rPr>
+              <a:t> Part B.</a:t>
+            </a:r>
+            <a:endParaRPr lang="en-US" sz="1200" dirty="0"/>
+          </a:p>
+          <a:p>
+            <a:pPr algn="l" marL="342900" indent="-342900">
+              <a:lnSpc>
+                <a:spcPts val="1620"/>
+              </a:lnSpc>
+              <a:spcAft>
+                <a:spcPts val="300"/>
+              </a:spcAft>
+              <a:buSzPct val="100000"/>
+              <a:buChar char="•"/>
+            </a:pPr>
+            <a:r>
+              <a:rPr lang="en-US" sz="1200" dirty="0">
+                <a:solidFill>
+                  <a:srgbClr val="1C2833"/>
+                </a:solidFill>
+                <a:latin typeface="Arial" pitchFamily="34" charset="0"/>
+                <a:ea typeface="Arial" pitchFamily="34" charset="-122"/>
+                <a:cs typeface="Arial" pitchFamily="34" charset="-120"/>
+              </a:rPr>
+              <a:t>8 questions: name the 8 limbs in order, name 3 of the 5 foundational āsanas, identify the breath assigned to 3 SN poses, short answer "what is yoga?"</a:t>
             </a:r>
             <a:endParaRPr lang="en-US" sz="1200" dirty="0"/>
           </a:p>
@@ -3267,7 +3298,7 @@
                 <a:ea typeface="Georgia" pitchFamily="34" charset="-122"/>
                 <a:cs typeface="Georgia" pitchFamily="34" charset="-120"/>
               </a:rPr>
-              <a:t>Differentiation</a:t>
+              <a:t>Project commitment (6 min)</a:t>
             </a:r>
             <a:endParaRPr lang="en-US" sz="1800" dirty="0"/>
           </a:p>
@@ -3282,7 +3313,7 @@
         <p:spPr>
           <a:xfrm>
             <a:off x="634901" y="883593"/>
-            <a:ext cx="8102798" cy="525661"/>
+            <a:ext cx="8102798" cy="975122"/>
           </a:xfrm>
           <a:prstGeom prst="rect">
             <a:avLst/>
@@ -3305,26 +3336,6 @@
               <a:buChar char="•"/>
             </a:pPr>
             <a:r>
-              <a:rPr lang="en-US" sz="1200" b="1" dirty="0">
-                <a:solidFill>
-                  <a:srgbClr val="1C2833"/>
-                </a:solidFill>
-                <a:latin typeface="Arial" pitchFamily="34" charset="0"/>
-                <a:ea typeface="Arial" pitchFamily="34" charset="-122"/>
-                <a:cs typeface="Arial" pitchFamily="34" charset="-120"/>
-              </a:rPr>
-              <a:t>Tier up:</a:t>
-            </a:r>
-            <a:pPr algn="l" indent="0" marL="0">
-              <a:lnSpc>
-                <a:spcPts val="1620"/>
-              </a:lnSpc>
-              <a:spcAft>
-                <a:spcPts val="300"/>
-              </a:spcAft>
-              <a:buNone/>
-            </a:pPr>
-            <a:r>
               <a:rPr lang="en-US" sz="1200" dirty="0">
                 <a:solidFill>
                   <a:srgbClr val="1C2833"/>
@@ -3333,7 +3344,7 @@
                 <a:ea typeface="Arial" pitchFamily="34" charset="-122"/>
                 <a:cs typeface="Arial" pitchFamily="34" charset="-120"/>
               </a:rPr>
-              <a:t> 3 rounds at home; experiment with holding each pose for 2 breaths instead of 1.</a:t>
+              <a:t>Hand out project brief.</a:t>
             </a:r>
             <a:endParaRPr lang="en-US" sz="1200" dirty="0"/>
           </a:p>
@@ -3349,24 +3360,28 @@
               <a:buChar char="•"/>
             </a:pPr>
             <a:r>
-              <a:rPr lang="en-US" sz="1200" b="1" dirty="0">
-                <a:solidFill>
-                  <a:srgbClr val="1C2833"/>
-                </a:solidFill>
-                <a:latin typeface="Arial" pitchFamily="34" charset="0"/>
-                <a:ea typeface="Arial" pitchFamily="34" charset="-122"/>
-                <a:cs typeface="Arial" pitchFamily="34" charset="-120"/>
-              </a:rPr>
-              <a:t>Tier down:</a:t>
-            </a:r>
-            <a:pPr algn="l" indent="0" marL="0">
+              <a:rPr lang="en-US" sz="1200" dirty="0">
+                <a:solidFill>
+                  <a:srgbClr val="1C2833"/>
+                </a:solidFill>
+                <a:latin typeface="Arial" pitchFamily="34" charset="0"/>
+                <a:ea typeface="Arial" pitchFamily="34" charset="-122"/>
+                <a:cs typeface="Arial" pitchFamily="34" charset="-120"/>
+              </a:rPr>
+              <a:t>Pairs / individuals choose target audience for their 5-min routine: peers / parents / younger siblings / classmates before a test.</a:t>
+            </a:r>
+            <a:endParaRPr lang="en-US" sz="1200" dirty="0"/>
+          </a:p>
+          <a:p>
+            <a:pPr algn="l" marL="342900" indent="-342900">
               <a:lnSpc>
                 <a:spcPts val="1620"/>
               </a:lnSpc>
               <a:spcAft>
                 <a:spcPts val="300"/>
               </a:spcAft>
-              <a:buNone/>
+              <a:buSzPct val="100000"/>
+              <a:buChar char="•"/>
             </a:pPr>
             <a:r>
               <a:rPr lang="en-US" sz="1200" dirty="0">
@@ -3377,7 +3392,7 @@
                 <a:ea typeface="Arial" pitchFamily="34" charset="-122"/>
                 <a:cs typeface="Arial" pitchFamily="34" charset="-120"/>
               </a:rPr>
-              <a:t> 1 round, half-speed; or use the modified short Sūrya Namaskāra (poses 1–5 + 11–12 only).</a:t>
+              <a:t>Each pair writes audience + 1-sentence intent on sticky note. Posts on the board.</a:t>
             </a:r>
             <a:endParaRPr lang="en-US" sz="1200" dirty="0"/>
           </a:p>
@@ -3535,7 +3550,7 @@
                 <a:ea typeface="Georgia" pitchFamily="34" charset="-122"/>
                 <a:cs typeface="Georgia" pitchFamily="34" charset="-120"/>
               </a:rPr>
-              <a:t>Teacher notes</a:t>
+              <a:t>Wrap-up (2 min)</a:t>
             </a:r>
             <a:endParaRPr lang="en-US" sz="1800" dirty="0"/>
           </a:p>
@@ -3549,8 +3564,8 @@
         </p:nvSpPr>
         <p:spPr>
           <a:xfrm>
-            <a:off x="406301" y="870942"/>
-            <a:ext cx="8498026" cy="426541"/>
+            <a:off x="634901" y="883593"/>
+            <a:ext cx="8102798" cy="525661"/>
           </a:xfrm>
           <a:prstGeom prst="rect">
             <a:avLst/>
@@ -3562,54 +3577,6 @@
           <a:bodyPr wrap="square" lIns="0" tIns="0" rIns="0" bIns="0" rtlCol="0" anchor="t"/>
           <a:lstStyle/>
           <a:p>
-            <a:pPr algn="l" indent="0" marL="0">
-              <a:lnSpc>
-                <a:spcPts val="1680"/>
-              </a:lnSpc>
-              <a:spcBef>
-                <a:spcPts val="300"/>
-              </a:spcBef>
-              <a:spcAft>
-                <a:spcPts val="300"/>
-              </a:spcAft>
-              <a:buNone/>
-            </a:pPr>
-            <a:r>
-              <a:rPr lang="en-US" sz="1200" dirty="0">
-                <a:solidFill>
-                  <a:srgbClr val="1C2833"/>
-                </a:solidFill>
-                <a:latin typeface="Arial" pitchFamily="34" charset="0"/>
-                <a:ea typeface="Arial" pitchFamily="34" charset="-122"/>
-                <a:cs typeface="Arial" pitchFamily="34" charset="-120"/>
-              </a:rPr>
-              <a:t>– The breath co-ordination is the hardest piece. Several students will hold their breath through 3–4 poses. Cue: "If you forget which breath, just keep breathing — that's better than holding."</a:t>
-            </a:r>
-            <a:endParaRPr lang="en-US" sz="1200" dirty="0"/>
-          </a:p>
-        </p:txBody>
-      </p:sp>
-      <p:sp>
-        <p:nvSpPr>
-          <p:cNvPr id="5" name="Text 3"/>
-          <p:cNvSpPr/>
-          <p:nvPr/>
-        </p:nvSpPr>
-        <p:spPr>
-          <a:xfrm>
-            <a:off x="634901" y="1386334"/>
-            <a:ext cx="8102798" cy="487561"/>
-          </a:xfrm>
-          <a:prstGeom prst="rect">
-            <a:avLst/>
-          </a:prstGeom>
-          <a:noFill/>
-          <a:ln/>
-        </p:spPr>
-        <p:txBody>
-          <a:bodyPr wrap="square" lIns="0" tIns="0" rIns="0" bIns="0" rtlCol="0" anchor="t"/>
-          <a:lstStyle/>
-          <a:p>
             <a:pPr algn="l" marL="342900" indent="-342900">
               <a:lnSpc>
                 <a:spcPts val="1620"/>
@@ -3629,44 +3596,20 @@
                 <a:ea typeface="Arial" pitchFamily="34" charset="-122"/>
                 <a:cs typeface="Arial" pitchFamily="34" charset="-120"/>
               </a:rPr>
-              <a:t>Śavāsana matters. Don't skip it even if you're short on time. Two minutes of supine rest after physical practice is essential.</a:t>
+              <a:t>Quick share: each pair states aloud their audience.</a:t>
             </a:r>
             <a:endParaRPr lang="en-US" sz="1200" dirty="0"/>
           </a:p>
-        </p:txBody>
-      </p:sp>
-      <p:sp>
-        <p:nvSpPr>
-          <p:cNvPr id="6" name="Text 4"/>
-          <p:cNvSpPr/>
-          <p:nvPr/>
-        </p:nvSpPr>
-        <p:spPr>
-          <a:xfrm>
-            <a:off x="406301" y="1962745"/>
-            <a:ext cx="8498026" cy="213271"/>
-          </a:xfrm>
-          <a:prstGeom prst="rect">
-            <a:avLst/>
-          </a:prstGeom>
-          <a:noFill/>
-          <a:ln/>
-        </p:spPr>
-        <p:txBody>
-          <a:bodyPr wrap="square" lIns="0" tIns="0" rIns="0" bIns="0" rtlCol="0" anchor="t"/>
-          <a:lstStyle/>
-          <a:p>
-            <a:pPr algn="l" indent="0" marL="0">
-              <a:lnSpc>
-                <a:spcPts val="1680"/>
-              </a:lnSpc>
-              <a:spcBef>
-                <a:spcPts val="300"/>
-              </a:spcBef>
-              <a:spcAft>
-                <a:spcPts val="300"/>
-              </a:spcAft>
-              <a:buNone/>
+          <a:p>
+            <a:pPr algn="l" marL="342900" indent="-342900">
+              <a:lnSpc>
+                <a:spcPts val="1620"/>
+              </a:lnSpc>
+              <a:spcAft>
+                <a:spcPts val="300"/>
+              </a:spcAft>
+              <a:buSzPct val="100000"/>
+              <a:buChar char="•"/>
             </a:pPr>
             <a:r>
               <a:rPr lang="en-US" sz="1200" dirty="0">
@@ -3677,7 +3620,27 @@
                 <a:ea typeface="Arial" pitchFamily="34" charset="-122"/>
                 <a:cs typeface="Arial" pitchFamily="34" charset="-120"/>
               </a:rPr>
-              <a:t>– Mark the formative quiz overnight.</a:t>
+              <a:t>Preview Day 6: </a:t>
+            </a:r>
+            <a:pPr algn="l" indent="0" marL="0">
+              <a:lnSpc>
+                <a:spcPts val="1620"/>
+              </a:lnSpc>
+              <a:spcAft>
+                <a:spcPts val="300"/>
+              </a:spcAft>
+              <a:buNone/>
+            </a:pPr>
+            <a:r>
+              <a:rPr lang="en-US" sz="1200" i="1" dirty="0">
+                <a:solidFill>
+                  <a:srgbClr val="1C2833"/>
+                </a:solidFill>
+                <a:latin typeface="Arial" pitchFamily="34" charset="0"/>
+                <a:ea typeface="Arial" pitchFamily="34" charset="-122"/>
+                <a:cs typeface="Arial" pitchFamily="34" charset="-120"/>
+              </a:rPr>
+              <a:t>"Tomorrow we slow down dramatically — natural-breath observation. Just sitting with the breath."</a:t>
             </a:r>
             <a:endParaRPr lang="en-US" sz="1200" dirty="0"/>
           </a:p>
@@ -3685,7 +3648,7 @@
       </p:sp>
       <p:sp>
         <p:nvSpPr>
-          <p:cNvPr id="7" name="Text 5"/>
+          <p:cNvPr id="5" name="Text 3"/>
           <p:cNvSpPr/>
           <p:nvPr/>
         </p:nvSpPr>
@@ -3835,7 +3798,7 @@
                 <a:ea typeface="Georgia" pitchFamily="34" charset="-122"/>
                 <a:cs typeface="Georgia" pitchFamily="34" charset="-120"/>
               </a:rPr>
-              <a:t>Citation(s) used in this lesson</a:t>
+              <a:t>Student-facing content</a:t>
             </a:r>
             <a:endParaRPr lang="en-US" sz="1800" dirty="0"/>
           </a:p>
@@ -3849,8 +3812,61 @@
         </p:nvSpPr>
         <p:spPr>
           <a:xfrm>
-            <a:off x="406301" y="870942"/>
-            <a:ext cx="8498026" cy="213271"/>
+            <a:off x="406301" y="883593"/>
+            <a:ext cx="8331398" cy="2381250"/>
+          </a:xfrm>
+          <a:prstGeom prst="rect">
+            <a:avLst/>
+          </a:prstGeom>
+          <a:solidFill>
+            <a:srgbClr val="F4F8F9"/>
+          </a:solidFill>
+          <a:ln/>
+        </p:spPr>
+        <p:txBody>
+          <a:bodyPr wrap="square" rtlCol="0" anchor="ctr"/>
+          <a:lstStyle/>
+          <a:p>
+            <a:pPr indent="0" marL="0">
+              <a:buNone/>
+            </a:pPr>
+            <a:endParaRPr lang="en-US" dirty="0"/>
+          </a:p>
+        </p:txBody>
+      </p:sp>
+      <p:sp>
+        <p:nvSpPr>
+          <p:cNvPr id="5" name="Shape 3"/>
+          <p:cNvSpPr/>
+          <p:nvPr/>
+        </p:nvSpPr>
+        <p:spPr>
+          <a:xfrm>
+            <a:off x="434876" y="883593"/>
+            <a:ext cx="0" cy="2381250"/>
+          </a:xfrm>
+          <a:prstGeom prst="line">
+            <a:avLst/>
+          </a:prstGeom>
+          <a:noFill/>
+          <a:ln w="57150">
+            <a:solidFill>
+              <a:srgbClr val="FE4447"/>
+            </a:solidFill>
+            <a:prstDash val="solid"/>
+          </a:ln>
+        </p:spPr>
+      </p:sp>
+      <p:sp>
+        <p:nvSpPr>
+          <p:cNvPr id="6" name="Text 4"/>
+          <p:cNvSpPr/>
+          <p:nvPr/>
+        </p:nvSpPr>
+        <p:spPr>
+          <a:xfrm>
+            <a:off x="692051" y="1074093"/>
+            <a:ext cx="7973389" cy="230981"/>
           </a:xfrm>
           <a:prstGeom prst="rect">
             <a:avLst/>
@@ -3864,6 +3880,338 @@
           <a:p>
             <a:pPr algn="l" indent="0" marL="0">
               <a:lnSpc>
+                <a:spcPts val="1820"/>
+              </a:lnSpc>
+              <a:spcBef>
+                <a:spcPts val="300"/>
+              </a:spcBef>
+              <a:spcAft>
+                <a:spcPts val="300"/>
+              </a:spcAft>
+              <a:buNone/>
+            </a:pPr>
+            <a:r>
+              <a:rPr lang="en-US" sz="1300" b="1" i="1" dirty="0">
+                <a:solidFill>
+                  <a:srgbClr val="1C2833"/>
+                </a:solidFill>
+                <a:latin typeface="Georgia" pitchFamily="34" charset="0"/>
+                <a:ea typeface="Georgia" pitchFamily="34" charset="-122"/>
+                <a:cs typeface="Georgia" pitchFamily="34" charset="-120"/>
+              </a:rPr>
+              <a:t>Sūrya Namaskāra — with breath</a:t>
+            </a:r>
+            <a:endParaRPr lang="en-US" sz="1300" dirty="0"/>
+          </a:p>
+        </p:txBody>
+      </p:sp>
+      <p:sp>
+        <p:nvSpPr>
+          <p:cNvPr id="7" name="Text 5"/>
+          <p:cNvSpPr/>
+          <p:nvPr/>
+        </p:nvSpPr>
+        <p:spPr>
+          <a:xfrm>
+            <a:off x="692051" y="1343174"/>
+            <a:ext cx="7973389" cy="230981"/>
+          </a:xfrm>
+          <a:prstGeom prst="rect">
+            <a:avLst/>
+          </a:prstGeom>
+          <a:noFill/>
+          <a:ln/>
+        </p:spPr>
+        <p:txBody>
+          <a:bodyPr wrap="square" lIns="0" tIns="0" rIns="0" bIns="0" rtlCol="0" anchor="t"/>
+          <a:lstStyle/>
+          <a:p>
+            <a:pPr algn="l" indent="0" marL="0">
+              <a:lnSpc>
+                <a:spcPts val="1820"/>
+              </a:lnSpc>
+              <a:spcBef>
+                <a:spcPts val="300"/>
+              </a:spcBef>
+              <a:spcAft>
+                <a:spcPts val="300"/>
+              </a:spcAft>
+              <a:buNone/>
+            </a:pPr>
+            <a:r>
+              <a:rPr lang="en-US" sz="1300" dirty="0">
+                <a:solidFill>
+                  <a:srgbClr val="1C2833"/>
+                </a:solidFill>
+                <a:latin typeface="Georgia" pitchFamily="34" charset="0"/>
+                <a:ea typeface="Georgia" pitchFamily="34" charset="-122"/>
+                <a:cs typeface="Georgia" pitchFamily="34" charset="-120"/>
+              </a:rPr>
+              <a:t>Pattern: </a:t>
+            </a:r>
+            <a:pPr algn="l" indent="0" marL="0">
+              <a:lnSpc>
+                <a:spcPts val="1820"/>
+              </a:lnSpc>
+              <a:spcBef>
+                <a:spcPts val="300"/>
+              </a:spcBef>
+              <a:spcAft>
+                <a:spcPts val="300"/>
+              </a:spcAft>
+              <a:buNone/>
+            </a:pPr>
+            <a:r>
+              <a:rPr lang="en-US" sz="1300" b="1" i="1" dirty="0">
+                <a:solidFill>
+                  <a:srgbClr val="1C2833"/>
+                </a:solidFill>
+                <a:latin typeface="Georgia" pitchFamily="34" charset="0"/>
+                <a:ea typeface="Georgia" pitchFamily="34" charset="-122"/>
+                <a:cs typeface="Georgia" pitchFamily="34" charset="-120"/>
+              </a:rPr>
+              <a:t>open body = inhale, fold body = exhale.</a:t>
+            </a:r>
+            <a:endParaRPr lang="en-US" sz="1300" dirty="0"/>
+          </a:p>
+        </p:txBody>
+      </p:sp>
+      <p:sp>
+        <p:nvSpPr>
+          <p:cNvPr id="8" name="Text 6"/>
+          <p:cNvSpPr/>
+          <p:nvPr/>
+        </p:nvSpPr>
+        <p:spPr>
+          <a:xfrm>
+            <a:off x="692051" y="1612255"/>
+            <a:ext cx="7973389" cy="230981"/>
+          </a:xfrm>
+          <a:prstGeom prst="rect">
+            <a:avLst/>
+          </a:prstGeom>
+          <a:noFill/>
+          <a:ln/>
+        </p:spPr>
+        <p:txBody>
+          <a:bodyPr wrap="square" lIns="0" tIns="0" rIns="0" bIns="0" rtlCol="0" anchor="t"/>
+          <a:lstStyle/>
+          <a:p>
+            <a:pPr algn="l" indent="0" marL="0">
+              <a:lnSpc>
+                <a:spcPts val="1820"/>
+              </a:lnSpc>
+              <a:spcBef>
+                <a:spcPts val="300"/>
+              </a:spcBef>
+              <a:spcAft>
+                <a:spcPts val="300"/>
+              </a:spcAft>
+              <a:buNone/>
+            </a:pPr>
+            <a:r>
+              <a:rPr lang="en-US" sz="1300" dirty="0">
+                <a:solidFill>
+                  <a:srgbClr val="1C2833"/>
+                </a:solidFill>
+                <a:latin typeface="Georgia" pitchFamily="34" charset="0"/>
+                <a:ea typeface="Georgia" pitchFamily="34" charset="-122"/>
+                <a:cs typeface="Georgia" pitchFamily="34" charset="-120"/>
+              </a:rPr>
+              <a:t>Maximum 2–3 rounds today. After the rounds, </a:t>
+            </a:r>
+            <a:pPr algn="l" indent="0" marL="0">
+              <a:lnSpc>
+                <a:spcPts val="1820"/>
+              </a:lnSpc>
+              <a:spcBef>
+                <a:spcPts val="300"/>
+              </a:spcBef>
+              <a:spcAft>
+                <a:spcPts val="300"/>
+              </a:spcAft>
+              <a:buNone/>
+            </a:pPr>
+            <a:r>
+              <a:rPr lang="en-US" sz="1300" i="1" dirty="0">
+                <a:solidFill>
+                  <a:srgbClr val="1C2833"/>
+                </a:solidFill>
+                <a:latin typeface="Georgia" pitchFamily="34" charset="0"/>
+                <a:ea typeface="Georgia" pitchFamily="34" charset="-122"/>
+                <a:cs typeface="Georgia" pitchFamily="34" charset="-120"/>
+              </a:rPr>
+              <a:t>śavāsana</a:t>
+            </a:r>
+            <a:pPr algn="l" indent="0" marL="0">
+              <a:lnSpc>
+                <a:spcPts val="1820"/>
+              </a:lnSpc>
+              <a:spcBef>
+                <a:spcPts val="300"/>
+              </a:spcBef>
+              <a:spcAft>
+                <a:spcPts val="300"/>
+              </a:spcAft>
+              <a:buNone/>
+            </a:pPr>
+            <a:r>
+              <a:rPr lang="en-US" sz="1300" dirty="0">
+                <a:solidFill>
+                  <a:srgbClr val="1C2833"/>
+                </a:solidFill>
+                <a:latin typeface="Georgia" pitchFamily="34" charset="0"/>
+                <a:ea typeface="Georgia" pitchFamily="34" charset="-122"/>
+                <a:cs typeface="Georgia" pitchFamily="34" charset="-120"/>
+              </a:rPr>
+              <a:t> (lie down, rest) for 2 minutes.</a:t>
+            </a:r>
+            <a:endParaRPr lang="en-US" sz="1300" dirty="0"/>
+          </a:p>
+        </p:txBody>
+      </p:sp>
+      <p:sp>
+        <p:nvSpPr>
+          <p:cNvPr id="9" name="Text 7"/>
+          <p:cNvSpPr/>
+          <p:nvPr/>
+        </p:nvSpPr>
+        <p:spPr>
+          <a:xfrm>
+            <a:off x="692051" y="1881336"/>
+            <a:ext cx="7973389" cy="230981"/>
+          </a:xfrm>
+          <a:prstGeom prst="rect">
+            <a:avLst/>
+          </a:prstGeom>
+          <a:noFill/>
+          <a:ln/>
+        </p:spPr>
+        <p:txBody>
+          <a:bodyPr wrap="square" lIns="0" tIns="0" rIns="0" bIns="0" rtlCol="0" anchor="t"/>
+          <a:lstStyle/>
+          <a:p>
+            <a:pPr algn="l" indent="0" marL="0">
+              <a:lnSpc>
+                <a:spcPts val="1820"/>
+              </a:lnSpc>
+              <a:spcBef>
+                <a:spcPts val="300"/>
+              </a:spcBef>
+              <a:spcAft>
+                <a:spcPts val="300"/>
+              </a:spcAft>
+              <a:buNone/>
+            </a:pPr>
+            <a:r>
+              <a:rPr lang="en-US" sz="1300" b="1" i="1" dirty="0">
+                <a:solidFill>
+                  <a:srgbClr val="1C2833"/>
+                </a:solidFill>
+                <a:latin typeface="Georgia" pitchFamily="34" charset="0"/>
+                <a:ea typeface="Georgia" pitchFamily="34" charset="-122"/>
+                <a:cs typeface="Georgia" pitchFamily="34" charset="-120"/>
+              </a:rPr>
+              <a:t>Project (Days 8–10):</a:t>
+            </a:r>
+            <a:pPr algn="l" indent="0" marL="0">
+              <a:lnSpc>
+                <a:spcPts val="1820"/>
+              </a:lnSpc>
+              <a:spcBef>
+                <a:spcPts val="300"/>
+              </a:spcBef>
+              <a:spcAft>
+                <a:spcPts val="300"/>
+              </a:spcAft>
+              <a:buNone/>
+            </a:pPr>
+            <a:r>
+              <a:rPr lang="en-US" sz="1300" dirty="0">
+                <a:solidFill>
+                  <a:srgbClr val="1C2833"/>
+                </a:solidFill>
+                <a:latin typeface="Georgia" pitchFamily="34" charset="0"/>
+                <a:ea typeface="Georgia" pitchFamily="34" charset="-122"/>
+                <a:cs typeface="Georgia" pitchFamily="34" charset="-120"/>
+              </a:rPr>
+              <a:t> Design a 5-minute yoga routine for ONE audience. Pick today:</a:t>
+            </a:r>
+            <a:endParaRPr lang="en-US" sz="1300" dirty="0"/>
+          </a:p>
+        </p:txBody>
+      </p:sp>
+      <p:sp>
+        <p:nvSpPr>
+          <p:cNvPr id="10" name="Text 8"/>
+          <p:cNvSpPr/>
+          <p:nvPr/>
+        </p:nvSpPr>
+        <p:spPr>
+          <a:xfrm>
+            <a:off x="692051" y="2150418"/>
+            <a:ext cx="7973389" cy="923925"/>
+          </a:xfrm>
+          <a:prstGeom prst="rect">
+            <a:avLst/>
+          </a:prstGeom>
+          <a:noFill/>
+          <a:ln/>
+        </p:spPr>
+        <p:txBody>
+          <a:bodyPr wrap="square" lIns="0" tIns="0" rIns="0" bIns="0" rtlCol="0" anchor="t"/>
+          <a:lstStyle/>
+          <a:p>
+            <a:pPr algn="l" indent="0" marL="0">
+              <a:lnSpc>
+                <a:spcPts val="1820"/>
+              </a:lnSpc>
+              <a:spcBef>
+                <a:spcPts val="300"/>
+              </a:spcBef>
+              <a:spcAft>
+                <a:spcPts val="300"/>
+              </a:spcAft>
+              <a:buNone/>
+            </a:pPr>
+            <a:r>
+              <a:rPr lang="en-US" sz="1300" i="1" dirty="0">
+                <a:solidFill>
+                  <a:srgbClr val="1C2833"/>
+                </a:solidFill>
+                <a:latin typeface="Georgia" pitchFamily="34" charset="0"/>
+                <a:ea typeface="Georgia" pitchFamily="34" charset="-122"/>
+                <a:cs typeface="Georgia" pitchFamily="34" charset="-120"/>
+              </a:rPr>
+              <a:t>| Audience | Examples of fitting āsanas | |----------|------------------------------| | Peers (your classmates) | Energising — standing poses, partial SN | | Parents | Relaxing — child's pose, seated stretches | | Younger siblings | Playful — animal poses (cat, cobra, downward dog) | | Pre-exam stress | Calming — child's pose, seated breath |</a:t>
+            </a:r>
+            <a:endParaRPr lang="en-US" sz="1300" dirty="0"/>
+          </a:p>
+        </p:txBody>
+      </p:sp>
+      <p:sp>
+        <p:nvSpPr>
+          <p:cNvPr id="11" name="Text 9"/>
+          <p:cNvSpPr/>
+          <p:nvPr/>
+        </p:nvSpPr>
+        <p:spPr>
+          <a:xfrm>
+            <a:off x="406301" y="4434929"/>
+            <a:ext cx="8498026" cy="213271"/>
+          </a:xfrm>
+          <a:prstGeom prst="rect">
+            <a:avLst/>
+          </a:prstGeom>
+          <a:noFill/>
+          <a:ln/>
+        </p:spPr>
+        <p:txBody>
+          <a:bodyPr wrap="square" lIns="0" tIns="0" rIns="0" bIns="0" rtlCol="0" anchor="t"/>
+          <a:lstStyle/>
+          <a:p>
+            <a:pPr algn="l" indent="0" marL="0">
+              <a:lnSpc>
                 <a:spcPts val="1680"/>
               </a:lnSpc>
               <a:spcBef>
@@ -3883,7 +4231,911 @@
                 <a:ea typeface="Arial" pitchFamily="34" charset="-122"/>
                 <a:cs typeface="Arial" pitchFamily="34" charset="-120"/>
               </a:rPr>
-              <a:t>– No new RAG citations. SN breath co-ordination is from modern practice (Krishnamacharya school).</a:t>
+              <a:t>Middle ·  · IKS Curriculum</a:t>
+            </a:r>
+            <a:endParaRPr lang="en-US" sz="1200" dirty="0"/>
+          </a:p>
+        </p:txBody>
+      </p:sp>
+    </p:spTree>
+  </p:cSld>
+  <p:clrMapOvr>
+    <a:masterClrMapping/>
+  </p:clrMapOvr>
+</p:sld>
+</file>
+
+<file path=ppt/slides/slide15.xml><?xml version="1.0" encoding="utf-8"?>
+<p:sld xmlns:a="http://schemas.openxmlformats.org/drawingml/2006/main" xmlns:r="http://schemas.openxmlformats.org/officeDocument/2006/relationships" xmlns:p="http://schemas.openxmlformats.org/presentationml/2006/main">
+  <p:cSld name="Slide 15">
+    <p:bg>
+      <p:bgPr>
+        <a:solidFill>
+          <a:srgbClr val="FFFFFF"/>
+        </a:solidFill>
+      </p:bgPr>
+    </p:bg>
+    <p:spTree>
+      <p:nvGrpSpPr>
+        <p:cNvPr id="1" name=""/>
+        <p:cNvGrpSpPr/>
+        <p:nvPr/>
+      </p:nvGrpSpPr>
+      <p:grpSpPr>
+        <a:xfrm>
+          <a:off x="0" y="0"/>
+          <a:ext cx="0" cy="0"/>
+          <a:chOff x="0" y="0"/>
+          <a:chExt cx="0" cy="0"/>
+        </a:xfrm>
+      </p:grpSpPr>
+      <p:sp>
+        <p:nvSpPr>
+          <p:cNvPr id="2" name="Text 0"/>
+          <p:cNvSpPr/>
+          <p:nvPr/>
+        </p:nvSpPr>
+        <p:spPr>
+          <a:xfrm>
+            <a:off x="0" y="0"/>
+            <a:ext cx="9144000" cy="101501"/>
+          </a:xfrm>
+          <a:prstGeom prst="rect">
+            <a:avLst/>
+          </a:prstGeom>
+          <a:solidFill>
+            <a:srgbClr val="277884"/>
+          </a:solidFill>
+          <a:ln/>
+        </p:spPr>
+        <p:txBody>
+          <a:bodyPr wrap="square" rtlCol="0" anchor="ctr"/>
+          <a:lstStyle/>
+          <a:p>
+            <a:pPr indent="0" marL="0">
+              <a:buNone/>
+            </a:pPr>
+            <a:endParaRPr lang="en-US" dirty="0"/>
+          </a:p>
+        </p:txBody>
+      </p:sp>
+      <p:sp>
+        <p:nvSpPr>
+          <p:cNvPr id="3" name="Text 1"/>
+          <p:cNvSpPr/>
+          <p:nvPr/>
+        </p:nvSpPr>
+        <p:spPr>
+          <a:xfrm>
+            <a:off x="406301" y="457051"/>
+            <a:ext cx="8498026" cy="274290"/>
+          </a:xfrm>
+          <a:prstGeom prst="rect">
+            <a:avLst/>
+          </a:prstGeom>
+          <a:noFill/>
+          <a:ln/>
+        </p:spPr>
+        <p:txBody>
+          <a:bodyPr wrap="square" lIns="0" tIns="0" rIns="0" bIns="0" rtlCol="0" anchor="t"/>
+          <a:lstStyle/>
+          <a:p>
+            <a:pPr algn="l" indent="0" marL="0">
+              <a:lnSpc>
+                <a:spcPts val="2160"/>
+              </a:lnSpc>
+              <a:spcBef>
+                <a:spcPts val="600"/>
+              </a:spcBef>
+              <a:spcAft>
+                <a:spcPts val="800"/>
+              </a:spcAft>
+              <a:buNone/>
+            </a:pPr>
+            <a:r>
+              <a:rPr lang="en-US" sz="1800" b="1" dirty="0">
+                <a:solidFill>
+                  <a:srgbClr val="FE4447"/>
+                </a:solidFill>
+                <a:latin typeface="Georgia" pitchFamily="34" charset="0"/>
+                <a:ea typeface="Georgia" pitchFamily="34" charset="-122"/>
+                <a:cs typeface="Georgia" pitchFamily="34" charset="-120"/>
+              </a:rPr>
+              <a:t>Homework</a:t>
+            </a:r>
+            <a:endParaRPr lang="en-US" sz="1800" dirty="0"/>
+          </a:p>
+        </p:txBody>
+      </p:sp>
+      <p:sp>
+        <p:nvSpPr>
+          <p:cNvPr id="4" name="Text 2"/>
+          <p:cNvSpPr/>
+          <p:nvPr/>
+        </p:nvSpPr>
+        <p:spPr>
+          <a:xfrm>
+            <a:off x="634901" y="883593"/>
+            <a:ext cx="8102798" cy="525661"/>
+          </a:xfrm>
+          <a:prstGeom prst="rect">
+            <a:avLst/>
+          </a:prstGeom>
+          <a:noFill/>
+          <a:ln/>
+        </p:spPr>
+        <p:txBody>
+          <a:bodyPr wrap="square" lIns="0" tIns="0" rIns="0" bIns="0" rtlCol="0" anchor="t"/>
+          <a:lstStyle/>
+          <a:p>
+            <a:pPr algn="l" marL="342900" indent="-342900">
+              <a:lnSpc>
+                <a:spcPts val="1620"/>
+              </a:lnSpc>
+              <a:spcAft>
+                <a:spcPts val="300"/>
+              </a:spcAft>
+              <a:buSzPct val="100000"/>
+              <a:buChar char="•"/>
+            </a:pPr>
+            <a:r>
+              <a:rPr lang="en-US" sz="1200" dirty="0">
+                <a:solidFill>
+                  <a:srgbClr val="1C2833"/>
+                </a:solidFill>
+                <a:latin typeface="Arial" pitchFamily="34" charset="0"/>
+                <a:ea typeface="Arial" pitchFamily="34" charset="-122"/>
+                <a:cs typeface="Arial" pitchFamily="34" charset="-120"/>
+              </a:rPr>
+              <a:t>1 round of Sūrya Namaskāra at home with breath co-ordination.</a:t>
+            </a:r>
+            <a:endParaRPr lang="en-US" sz="1200" dirty="0"/>
+          </a:p>
+          <a:p>
+            <a:pPr algn="l" marL="342900" indent="-342900">
+              <a:lnSpc>
+                <a:spcPts val="1620"/>
+              </a:lnSpc>
+              <a:spcAft>
+                <a:spcPts val="300"/>
+              </a:spcAft>
+              <a:buSzPct val="100000"/>
+              <a:buChar char="•"/>
+            </a:pPr>
+            <a:r>
+              <a:rPr lang="en-US" sz="1200" dirty="0">
+                <a:solidFill>
+                  <a:srgbClr val="1C2833"/>
+                </a:solidFill>
+                <a:latin typeface="Arial" pitchFamily="34" charset="0"/>
+                <a:ea typeface="Arial" pitchFamily="34" charset="-122"/>
+                <a:cs typeface="Arial" pitchFamily="34" charset="-120"/>
+              </a:rPr>
+              <a:t>Submit your project plan paragraph by tomorrow.</a:t>
+            </a:r>
+            <a:endParaRPr lang="en-US" sz="1200" dirty="0"/>
+          </a:p>
+        </p:txBody>
+      </p:sp>
+      <p:sp>
+        <p:nvSpPr>
+          <p:cNvPr id="5" name="Text 3"/>
+          <p:cNvSpPr/>
+          <p:nvPr/>
+        </p:nvSpPr>
+        <p:spPr>
+          <a:xfrm>
+            <a:off x="406301" y="4434929"/>
+            <a:ext cx="8498026" cy="213271"/>
+          </a:xfrm>
+          <a:prstGeom prst="rect">
+            <a:avLst/>
+          </a:prstGeom>
+          <a:noFill/>
+          <a:ln/>
+        </p:spPr>
+        <p:txBody>
+          <a:bodyPr wrap="square" lIns="0" tIns="0" rIns="0" bIns="0" rtlCol="0" anchor="t"/>
+          <a:lstStyle/>
+          <a:p>
+            <a:pPr algn="l" indent="0" marL="0">
+              <a:lnSpc>
+                <a:spcPts val="1680"/>
+              </a:lnSpc>
+              <a:spcBef>
+                <a:spcPts val="300"/>
+              </a:spcBef>
+              <a:spcAft>
+                <a:spcPts val="300"/>
+              </a:spcAft>
+              <a:buNone/>
+            </a:pPr>
+            <a:r>
+              <a:rPr lang="en-US" sz="1200" dirty="0">
+                <a:solidFill>
+                  <a:srgbClr val="1C2833"/>
+                </a:solidFill>
+                <a:latin typeface="Arial" pitchFamily="34" charset="0"/>
+                <a:ea typeface="Arial" pitchFamily="34" charset="-122"/>
+                <a:cs typeface="Arial" pitchFamily="34" charset="-120"/>
+              </a:rPr>
+              <a:t>Middle ·  · IKS Curriculum</a:t>
+            </a:r>
+            <a:endParaRPr lang="en-US" sz="1200" dirty="0"/>
+          </a:p>
+        </p:txBody>
+      </p:sp>
+    </p:spTree>
+  </p:cSld>
+  <p:clrMapOvr>
+    <a:masterClrMapping/>
+  </p:clrMapOvr>
+</p:sld>
+</file>
+
+<file path=ppt/slides/slide16.xml><?xml version="1.0" encoding="utf-8"?>
+<p:sld xmlns:a="http://schemas.openxmlformats.org/drawingml/2006/main" xmlns:r="http://schemas.openxmlformats.org/officeDocument/2006/relationships" xmlns:p="http://schemas.openxmlformats.org/presentationml/2006/main">
+  <p:cSld name="Slide 16">
+    <p:bg>
+      <p:bgPr>
+        <a:solidFill>
+          <a:srgbClr val="FFFFFF"/>
+        </a:solidFill>
+      </p:bgPr>
+    </p:bg>
+    <p:spTree>
+      <p:nvGrpSpPr>
+        <p:cNvPr id="1" name=""/>
+        <p:cNvGrpSpPr/>
+        <p:nvPr/>
+      </p:nvGrpSpPr>
+      <p:grpSpPr>
+        <a:xfrm>
+          <a:off x="0" y="0"/>
+          <a:ext cx="0" cy="0"/>
+          <a:chOff x="0" y="0"/>
+          <a:chExt cx="0" cy="0"/>
+        </a:xfrm>
+      </p:grpSpPr>
+      <p:sp>
+        <p:nvSpPr>
+          <p:cNvPr id="2" name="Text 0"/>
+          <p:cNvSpPr/>
+          <p:nvPr/>
+        </p:nvSpPr>
+        <p:spPr>
+          <a:xfrm>
+            <a:off x="0" y="0"/>
+            <a:ext cx="9144000" cy="101501"/>
+          </a:xfrm>
+          <a:prstGeom prst="rect">
+            <a:avLst/>
+          </a:prstGeom>
+          <a:solidFill>
+            <a:srgbClr val="277884"/>
+          </a:solidFill>
+          <a:ln/>
+        </p:spPr>
+        <p:txBody>
+          <a:bodyPr wrap="square" rtlCol="0" anchor="ctr"/>
+          <a:lstStyle/>
+          <a:p>
+            <a:pPr indent="0" marL="0">
+              <a:buNone/>
+            </a:pPr>
+            <a:endParaRPr lang="en-US" dirty="0"/>
+          </a:p>
+        </p:txBody>
+      </p:sp>
+      <p:sp>
+        <p:nvSpPr>
+          <p:cNvPr id="3" name="Text 1"/>
+          <p:cNvSpPr/>
+          <p:nvPr/>
+        </p:nvSpPr>
+        <p:spPr>
+          <a:xfrm>
+            <a:off x="406301" y="457051"/>
+            <a:ext cx="8498026" cy="274290"/>
+          </a:xfrm>
+          <a:prstGeom prst="rect">
+            <a:avLst/>
+          </a:prstGeom>
+          <a:noFill/>
+          <a:ln/>
+        </p:spPr>
+        <p:txBody>
+          <a:bodyPr wrap="square" lIns="0" tIns="0" rIns="0" bIns="0" rtlCol="0" anchor="t"/>
+          <a:lstStyle/>
+          <a:p>
+            <a:pPr algn="l" indent="0" marL="0">
+              <a:lnSpc>
+                <a:spcPts val="2160"/>
+              </a:lnSpc>
+              <a:spcBef>
+                <a:spcPts val="600"/>
+              </a:spcBef>
+              <a:spcAft>
+                <a:spcPts val="800"/>
+              </a:spcAft>
+              <a:buNone/>
+            </a:pPr>
+            <a:r>
+              <a:rPr lang="en-US" sz="1800" b="1" dirty="0">
+                <a:solidFill>
+                  <a:srgbClr val="FE4447"/>
+                </a:solidFill>
+                <a:latin typeface="Georgia" pitchFamily="34" charset="0"/>
+                <a:ea typeface="Georgia" pitchFamily="34" charset="-122"/>
+                <a:cs typeface="Georgia" pitchFamily="34" charset="-120"/>
+              </a:rPr>
+              <a:t>Differentiation</a:t>
+            </a:r>
+            <a:endParaRPr lang="en-US" sz="1800" dirty="0"/>
+          </a:p>
+        </p:txBody>
+      </p:sp>
+      <p:sp>
+        <p:nvSpPr>
+          <p:cNvPr id="4" name="Text 2"/>
+          <p:cNvSpPr/>
+          <p:nvPr/>
+        </p:nvSpPr>
+        <p:spPr>
+          <a:xfrm>
+            <a:off x="634901" y="883593"/>
+            <a:ext cx="8102798" cy="525661"/>
+          </a:xfrm>
+          <a:prstGeom prst="rect">
+            <a:avLst/>
+          </a:prstGeom>
+          <a:noFill/>
+          <a:ln/>
+        </p:spPr>
+        <p:txBody>
+          <a:bodyPr wrap="square" lIns="0" tIns="0" rIns="0" bIns="0" rtlCol="0" anchor="t"/>
+          <a:lstStyle/>
+          <a:p>
+            <a:pPr algn="l" marL="342900" indent="-342900">
+              <a:lnSpc>
+                <a:spcPts val="1620"/>
+              </a:lnSpc>
+              <a:spcAft>
+                <a:spcPts val="300"/>
+              </a:spcAft>
+              <a:buSzPct val="100000"/>
+              <a:buChar char="•"/>
+            </a:pPr>
+            <a:r>
+              <a:rPr lang="en-US" sz="1200" b="1" dirty="0">
+                <a:solidFill>
+                  <a:srgbClr val="1C2833"/>
+                </a:solidFill>
+                <a:latin typeface="Arial" pitchFamily="34" charset="0"/>
+                <a:ea typeface="Arial" pitchFamily="34" charset="-122"/>
+                <a:cs typeface="Arial" pitchFamily="34" charset="-120"/>
+              </a:rPr>
+              <a:t>Tier up:</a:t>
+            </a:r>
+            <a:pPr algn="l" indent="0" marL="0">
+              <a:lnSpc>
+                <a:spcPts val="1620"/>
+              </a:lnSpc>
+              <a:spcAft>
+                <a:spcPts val="300"/>
+              </a:spcAft>
+              <a:buNone/>
+            </a:pPr>
+            <a:r>
+              <a:rPr lang="en-US" sz="1200" dirty="0">
+                <a:solidFill>
+                  <a:srgbClr val="1C2833"/>
+                </a:solidFill>
+                <a:latin typeface="Arial" pitchFamily="34" charset="0"/>
+                <a:ea typeface="Arial" pitchFamily="34" charset="-122"/>
+                <a:cs typeface="Arial" pitchFamily="34" charset="-120"/>
+              </a:rPr>
+              <a:t> 3 rounds at home; experiment with holding each pose for 2 breaths instead of 1.</a:t>
+            </a:r>
+            <a:endParaRPr lang="en-US" sz="1200" dirty="0"/>
+          </a:p>
+          <a:p>
+            <a:pPr algn="l" marL="342900" indent="-342900">
+              <a:lnSpc>
+                <a:spcPts val="1620"/>
+              </a:lnSpc>
+              <a:spcAft>
+                <a:spcPts val="300"/>
+              </a:spcAft>
+              <a:buSzPct val="100000"/>
+              <a:buChar char="•"/>
+            </a:pPr>
+            <a:r>
+              <a:rPr lang="en-US" sz="1200" b="1" dirty="0">
+                <a:solidFill>
+                  <a:srgbClr val="1C2833"/>
+                </a:solidFill>
+                <a:latin typeface="Arial" pitchFamily="34" charset="0"/>
+                <a:ea typeface="Arial" pitchFamily="34" charset="-122"/>
+                <a:cs typeface="Arial" pitchFamily="34" charset="-120"/>
+              </a:rPr>
+              <a:t>Tier down:</a:t>
+            </a:r>
+            <a:pPr algn="l" indent="0" marL="0">
+              <a:lnSpc>
+                <a:spcPts val="1620"/>
+              </a:lnSpc>
+              <a:spcAft>
+                <a:spcPts val="300"/>
+              </a:spcAft>
+              <a:buNone/>
+            </a:pPr>
+            <a:r>
+              <a:rPr lang="en-US" sz="1200" dirty="0">
+                <a:solidFill>
+                  <a:srgbClr val="1C2833"/>
+                </a:solidFill>
+                <a:latin typeface="Arial" pitchFamily="34" charset="0"/>
+                <a:ea typeface="Arial" pitchFamily="34" charset="-122"/>
+                <a:cs typeface="Arial" pitchFamily="34" charset="-120"/>
+              </a:rPr>
+              <a:t> 1 round, half-speed; or use the modified short Sūrya Namaskāra (poses 1–5 + 11–12 only).</a:t>
+            </a:r>
+            <a:endParaRPr lang="en-US" sz="1200" dirty="0"/>
+          </a:p>
+        </p:txBody>
+      </p:sp>
+      <p:sp>
+        <p:nvSpPr>
+          <p:cNvPr id="5" name="Text 3"/>
+          <p:cNvSpPr/>
+          <p:nvPr/>
+        </p:nvSpPr>
+        <p:spPr>
+          <a:xfrm>
+            <a:off x="406301" y="4434929"/>
+            <a:ext cx="8498026" cy="213271"/>
+          </a:xfrm>
+          <a:prstGeom prst="rect">
+            <a:avLst/>
+          </a:prstGeom>
+          <a:noFill/>
+          <a:ln/>
+        </p:spPr>
+        <p:txBody>
+          <a:bodyPr wrap="square" lIns="0" tIns="0" rIns="0" bIns="0" rtlCol="0" anchor="t"/>
+          <a:lstStyle/>
+          <a:p>
+            <a:pPr algn="l" indent="0" marL="0">
+              <a:lnSpc>
+                <a:spcPts val="1680"/>
+              </a:lnSpc>
+              <a:spcBef>
+                <a:spcPts val="300"/>
+              </a:spcBef>
+              <a:spcAft>
+                <a:spcPts val="300"/>
+              </a:spcAft>
+              <a:buNone/>
+            </a:pPr>
+            <a:r>
+              <a:rPr lang="en-US" sz="1200" dirty="0">
+                <a:solidFill>
+                  <a:srgbClr val="1C2833"/>
+                </a:solidFill>
+                <a:latin typeface="Arial" pitchFamily="34" charset="0"/>
+                <a:ea typeface="Arial" pitchFamily="34" charset="-122"/>
+                <a:cs typeface="Arial" pitchFamily="34" charset="-120"/>
+              </a:rPr>
+              <a:t>Middle ·  · IKS Curriculum</a:t>
+            </a:r>
+            <a:endParaRPr lang="en-US" sz="1200" dirty="0"/>
+          </a:p>
+        </p:txBody>
+      </p:sp>
+    </p:spTree>
+  </p:cSld>
+  <p:clrMapOvr>
+    <a:masterClrMapping/>
+  </p:clrMapOvr>
+</p:sld>
+</file>
+
+<file path=ppt/slides/slide17.xml><?xml version="1.0" encoding="utf-8"?>
+<p:sld xmlns:a="http://schemas.openxmlformats.org/drawingml/2006/main" xmlns:r="http://schemas.openxmlformats.org/officeDocument/2006/relationships" xmlns:p="http://schemas.openxmlformats.org/presentationml/2006/main">
+  <p:cSld name="Slide 17">
+    <p:bg>
+      <p:bgPr>
+        <a:solidFill>
+          <a:srgbClr val="FFFFFF"/>
+        </a:solidFill>
+      </p:bgPr>
+    </p:bg>
+    <p:spTree>
+      <p:nvGrpSpPr>
+        <p:cNvPr id="1" name=""/>
+        <p:cNvGrpSpPr/>
+        <p:nvPr/>
+      </p:nvGrpSpPr>
+      <p:grpSpPr>
+        <a:xfrm>
+          <a:off x="0" y="0"/>
+          <a:ext cx="0" cy="0"/>
+          <a:chOff x="0" y="0"/>
+          <a:chExt cx="0" cy="0"/>
+        </a:xfrm>
+      </p:grpSpPr>
+      <p:sp>
+        <p:nvSpPr>
+          <p:cNvPr id="2" name="Text 0"/>
+          <p:cNvSpPr/>
+          <p:nvPr/>
+        </p:nvSpPr>
+        <p:spPr>
+          <a:xfrm>
+            <a:off x="0" y="0"/>
+            <a:ext cx="9144000" cy="101501"/>
+          </a:xfrm>
+          <a:prstGeom prst="rect">
+            <a:avLst/>
+          </a:prstGeom>
+          <a:solidFill>
+            <a:srgbClr val="277884"/>
+          </a:solidFill>
+          <a:ln/>
+        </p:spPr>
+        <p:txBody>
+          <a:bodyPr wrap="square" rtlCol="0" anchor="ctr"/>
+          <a:lstStyle/>
+          <a:p>
+            <a:pPr indent="0" marL="0">
+              <a:buNone/>
+            </a:pPr>
+            <a:endParaRPr lang="en-US" dirty="0"/>
+          </a:p>
+        </p:txBody>
+      </p:sp>
+      <p:sp>
+        <p:nvSpPr>
+          <p:cNvPr id="3" name="Text 1"/>
+          <p:cNvSpPr/>
+          <p:nvPr/>
+        </p:nvSpPr>
+        <p:spPr>
+          <a:xfrm>
+            <a:off x="406301" y="457051"/>
+            <a:ext cx="8498026" cy="274290"/>
+          </a:xfrm>
+          <a:prstGeom prst="rect">
+            <a:avLst/>
+          </a:prstGeom>
+          <a:noFill/>
+          <a:ln/>
+        </p:spPr>
+        <p:txBody>
+          <a:bodyPr wrap="square" lIns="0" tIns="0" rIns="0" bIns="0" rtlCol="0" anchor="t"/>
+          <a:lstStyle/>
+          <a:p>
+            <a:pPr algn="l" indent="0" marL="0">
+              <a:lnSpc>
+                <a:spcPts val="2160"/>
+              </a:lnSpc>
+              <a:spcBef>
+                <a:spcPts val="600"/>
+              </a:spcBef>
+              <a:spcAft>
+                <a:spcPts val="800"/>
+              </a:spcAft>
+              <a:buNone/>
+            </a:pPr>
+            <a:r>
+              <a:rPr lang="en-US" sz="1800" b="1" dirty="0">
+                <a:solidFill>
+                  <a:srgbClr val="FE4447"/>
+                </a:solidFill>
+                <a:latin typeface="Georgia" pitchFamily="34" charset="0"/>
+                <a:ea typeface="Georgia" pitchFamily="34" charset="-122"/>
+                <a:cs typeface="Georgia" pitchFamily="34" charset="-120"/>
+              </a:rPr>
+              <a:t>Teacher notes</a:t>
+            </a:r>
+            <a:endParaRPr lang="en-US" sz="1800" dirty="0"/>
+          </a:p>
+        </p:txBody>
+      </p:sp>
+      <p:sp>
+        <p:nvSpPr>
+          <p:cNvPr id="4" name="Text 2"/>
+          <p:cNvSpPr/>
+          <p:nvPr/>
+        </p:nvSpPr>
+        <p:spPr>
+          <a:xfrm>
+            <a:off x="634901" y="883593"/>
+            <a:ext cx="8102798" cy="1180802"/>
+          </a:xfrm>
+          <a:prstGeom prst="rect">
+            <a:avLst/>
+          </a:prstGeom>
+          <a:noFill/>
+          <a:ln/>
+        </p:spPr>
+        <p:txBody>
+          <a:bodyPr wrap="square" lIns="0" tIns="0" rIns="0" bIns="0" rtlCol="0" anchor="t"/>
+          <a:lstStyle/>
+          <a:p>
+            <a:pPr algn="l" marL="342900" indent="-342900">
+              <a:lnSpc>
+                <a:spcPts val="1620"/>
+              </a:lnSpc>
+              <a:spcAft>
+                <a:spcPts val="300"/>
+              </a:spcAft>
+              <a:buSzPct val="100000"/>
+              <a:buChar char="•"/>
+            </a:pPr>
+            <a:r>
+              <a:rPr lang="en-US" sz="1200" dirty="0">
+                <a:solidFill>
+                  <a:srgbClr val="1C2833"/>
+                </a:solidFill>
+                <a:latin typeface="Arial" pitchFamily="34" charset="0"/>
+                <a:ea typeface="Arial" pitchFamily="34" charset="-122"/>
+                <a:cs typeface="Arial" pitchFamily="34" charset="-120"/>
+              </a:rPr>
+              <a:t>The breath co-ordination is the hardest piece. Several students will hold their breath through 3–4 poses. Cue: "If you forget which breath, just keep breathing — that's better than holding."</a:t>
+            </a:r>
+            <a:endParaRPr lang="en-US" sz="1200" dirty="0"/>
+          </a:p>
+          <a:p>
+            <a:pPr algn="l" marL="342900" indent="-342900">
+              <a:lnSpc>
+                <a:spcPts val="1620"/>
+              </a:lnSpc>
+              <a:spcAft>
+                <a:spcPts val="300"/>
+              </a:spcAft>
+              <a:buSzPct val="100000"/>
+              <a:buChar char="•"/>
+            </a:pPr>
+            <a:r>
+              <a:rPr lang="en-US" sz="1200" dirty="0">
+                <a:solidFill>
+                  <a:srgbClr val="1C2833"/>
+                </a:solidFill>
+                <a:latin typeface="Arial" pitchFamily="34" charset="0"/>
+                <a:ea typeface="Arial" pitchFamily="34" charset="-122"/>
+                <a:cs typeface="Arial" pitchFamily="34" charset="-120"/>
+              </a:rPr>
+              <a:t>Śavāsana matters. Don't skip it even if you're short on time. Two minutes of supine rest after physical practice is essential.</a:t>
+            </a:r>
+            <a:endParaRPr lang="en-US" sz="1200" dirty="0"/>
+          </a:p>
+          <a:p>
+            <a:pPr algn="l" marL="342900" indent="-342900">
+              <a:lnSpc>
+                <a:spcPts val="1620"/>
+              </a:lnSpc>
+              <a:spcAft>
+                <a:spcPts val="300"/>
+              </a:spcAft>
+              <a:buSzPct val="100000"/>
+              <a:buChar char="•"/>
+            </a:pPr>
+            <a:r>
+              <a:rPr lang="en-US" sz="1200" dirty="0">
+                <a:solidFill>
+                  <a:srgbClr val="1C2833"/>
+                </a:solidFill>
+                <a:latin typeface="Arial" pitchFamily="34" charset="0"/>
+                <a:ea typeface="Arial" pitchFamily="34" charset="-122"/>
+                <a:cs typeface="Arial" pitchFamily="34" charset="-120"/>
+              </a:rPr>
+              <a:t>Mark the formative quiz overnight.</a:t>
+            </a:r>
+            <a:endParaRPr lang="en-US" sz="1200" dirty="0"/>
+          </a:p>
+        </p:txBody>
+      </p:sp>
+      <p:sp>
+        <p:nvSpPr>
+          <p:cNvPr id="5" name="Text 3"/>
+          <p:cNvSpPr/>
+          <p:nvPr/>
+        </p:nvSpPr>
+        <p:spPr>
+          <a:xfrm>
+            <a:off x="406301" y="4434929"/>
+            <a:ext cx="8498026" cy="213271"/>
+          </a:xfrm>
+          <a:prstGeom prst="rect">
+            <a:avLst/>
+          </a:prstGeom>
+          <a:noFill/>
+          <a:ln/>
+        </p:spPr>
+        <p:txBody>
+          <a:bodyPr wrap="square" lIns="0" tIns="0" rIns="0" bIns="0" rtlCol="0" anchor="t"/>
+          <a:lstStyle/>
+          <a:p>
+            <a:pPr algn="l" indent="0" marL="0">
+              <a:lnSpc>
+                <a:spcPts val="1680"/>
+              </a:lnSpc>
+              <a:spcBef>
+                <a:spcPts val="300"/>
+              </a:spcBef>
+              <a:spcAft>
+                <a:spcPts val="300"/>
+              </a:spcAft>
+              <a:buNone/>
+            </a:pPr>
+            <a:r>
+              <a:rPr lang="en-US" sz="1200" dirty="0">
+                <a:solidFill>
+                  <a:srgbClr val="1C2833"/>
+                </a:solidFill>
+                <a:latin typeface="Arial" pitchFamily="34" charset="0"/>
+                <a:ea typeface="Arial" pitchFamily="34" charset="-122"/>
+                <a:cs typeface="Arial" pitchFamily="34" charset="-120"/>
+              </a:rPr>
+              <a:t>Middle ·  · IKS Curriculum</a:t>
+            </a:r>
+            <a:endParaRPr lang="en-US" sz="1200" dirty="0"/>
+          </a:p>
+        </p:txBody>
+      </p:sp>
+    </p:spTree>
+  </p:cSld>
+  <p:clrMapOvr>
+    <a:masterClrMapping/>
+  </p:clrMapOvr>
+</p:sld>
+</file>
+
+<file path=ppt/slides/slide18.xml><?xml version="1.0" encoding="utf-8"?>
+<p:sld xmlns:a="http://schemas.openxmlformats.org/drawingml/2006/main" xmlns:r="http://schemas.openxmlformats.org/officeDocument/2006/relationships" xmlns:p="http://schemas.openxmlformats.org/presentationml/2006/main">
+  <p:cSld name="Slide 18">
+    <p:bg>
+      <p:bgPr>
+        <a:solidFill>
+          <a:srgbClr val="FFFFFF"/>
+        </a:solidFill>
+      </p:bgPr>
+    </p:bg>
+    <p:spTree>
+      <p:nvGrpSpPr>
+        <p:cNvPr id="1" name=""/>
+        <p:cNvGrpSpPr/>
+        <p:nvPr/>
+      </p:nvGrpSpPr>
+      <p:grpSpPr>
+        <a:xfrm>
+          <a:off x="0" y="0"/>
+          <a:ext cx="0" cy="0"/>
+          <a:chOff x="0" y="0"/>
+          <a:chExt cx="0" cy="0"/>
+        </a:xfrm>
+      </p:grpSpPr>
+      <p:sp>
+        <p:nvSpPr>
+          <p:cNvPr id="2" name="Text 0"/>
+          <p:cNvSpPr/>
+          <p:nvPr/>
+        </p:nvSpPr>
+        <p:spPr>
+          <a:xfrm>
+            <a:off x="0" y="0"/>
+            <a:ext cx="9144000" cy="101501"/>
+          </a:xfrm>
+          <a:prstGeom prst="rect">
+            <a:avLst/>
+          </a:prstGeom>
+          <a:solidFill>
+            <a:srgbClr val="277884"/>
+          </a:solidFill>
+          <a:ln/>
+        </p:spPr>
+        <p:txBody>
+          <a:bodyPr wrap="square" rtlCol="0" anchor="ctr"/>
+          <a:lstStyle/>
+          <a:p>
+            <a:pPr indent="0" marL="0">
+              <a:buNone/>
+            </a:pPr>
+            <a:endParaRPr lang="en-US" dirty="0"/>
+          </a:p>
+        </p:txBody>
+      </p:sp>
+      <p:sp>
+        <p:nvSpPr>
+          <p:cNvPr id="3" name="Text 1"/>
+          <p:cNvSpPr/>
+          <p:nvPr/>
+        </p:nvSpPr>
+        <p:spPr>
+          <a:xfrm>
+            <a:off x="406301" y="457051"/>
+            <a:ext cx="8498026" cy="274290"/>
+          </a:xfrm>
+          <a:prstGeom prst="rect">
+            <a:avLst/>
+          </a:prstGeom>
+          <a:noFill/>
+          <a:ln/>
+        </p:spPr>
+        <p:txBody>
+          <a:bodyPr wrap="square" lIns="0" tIns="0" rIns="0" bIns="0" rtlCol="0" anchor="t"/>
+          <a:lstStyle/>
+          <a:p>
+            <a:pPr algn="l" indent="0" marL="0">
+              <a:lnSpc>
+                <a:spcPts val="2160"/>
+              </a:lnSpc>
+              <a:spcBef>
+                <a:spcPts val="600"/>
+              </a:spcBef>
+              <a:spcAft>
+                <a:spcPts val="800"/>
+              </a:spcAft>
+              <a:buNone/>
+            </a:pPr>
+            <a:r>
+              <a:rPr lang="en-US" sz="1800" b="1" dirty="0">
+                <a:solidFill>
+                  <a:srgbClr val="FE4447"/>
+                </a:solidFill>
+                <a:latin typeface="Georgia" pitchFamily="34" charset="0"/>
+                <a:ea typeface="Georgia" pitchFamily="34" charset="-122"/>
+                <a:cs typeface="Georgia" pitchFamily="34" charset="-120"/>
+              </a:rPr>
+              <a:t>Citation(s) used in this lesson</a:t>
+            </a:r>
+            <a:endParaRPr lang="en-US" sz="1800" dirty="0"/>
+          </a:p>
+        </p:txBody>
+      </p:sp>
+      <p:sp>
+        <p:nvSpPr>
+          <p:cNvPr id="4" name="Text 2"/>
+          <p:cNvSpPr/>
+          <p:nvPr/>
+        </p:nvSpPr>
+        <p:spPr>
+          <a:xfrm>
+            <a:off x="634901" y="883593"/>
+            <a:ext cx="8102798" cy="281880"/>
+          </a:xfrm>
+          <a:prstGeom prst="rect">
+            <a:avLst/>
+          </a:prstGeom>
+          <a:noFill/>
+          <a:ln/>
+        </p:spPr>
+        <p:txBody>
+          <a:bodyPr wrap="square" lIns="0" tIns="0" rIns="0" bIns="0" rtlCol="0" anchor="t"/>
+          <a:lstStyle/>
+          <a:p>
+            <a:pPr algn="l" marL="342900" indent="-342900">
+              <a:lnSpc>
+                <a:spcPts val="1620"/>
+              </a:lnSpc>
+              <a:spcAft>
+                <a:spcPts val="300"/>
+              </a:spcAft>
+              <a:buSzPct val="100000"/>
+              <a:buChar char="•"/>
+            </a:pPr>
+            <a:r>
+              <a:rPr lang="en-US" sz="1200" dirty="0">
+                <a:solidFill>
+                  <a:srgbClr val="1C2833"/>
+                </a:solidFill>
+                <a:latin typeface="Arial" pitchFamily="34" charset="0"/>
+                <a:ea typeface="Arial" pitchFamily="34" charset="-122"/>
+                <a:cs typeface="Arial" pitchFamily="34" charset="-120"/>
+              </a:rPr>
+              <a:t>No new RAG citations. SN breath co-ordination is from modern practice (Krishnamacharya school).</a:t>
             </a:r>
             <a:endParaRPr lang="en-US" sz="1200" dirty="0"/>
           </a:p>
@@ -4041,7 +5293,7 @@
                 <a:ea typeface="Georgia" pitchFamily="34" charset="-122"/>
                 <a:cs typeface="Georgia" pitchFamily="34" charset="-120"/>
               </a:rPr>
-              <a:t>Materials</a:t>
+              <a:t>Learning objective</a:t>
             </a:r>
             <a:endParaRPr lang="en-US" sz="1800" dirty="0"/>
           </a:p>
@@ -4056,7 +5308,7 @@
         <p:spPr>
           <a:xfrm>
             <a:off x="406301" y="870942"/>
-            <a:ext cx="8498026" cy="222796"/>
+            <a:ext cx="8498026" cy="426541"/>
           </a:xfrm>
           <a:prstGeom prst="rect">
             <a:avLst/>
@@ -4089,53 +5341,7 @@
                 <a:ea typeface="Arial" pitchFamily="34" charset="-122"/>
                 <a:cs typeface="Arial" pitchFamily="34" charset="-120"/>
               </a:rPr>
-              <a:t>– Mats. Sūrya Namaskāra poster. – Formative quiz (</a:t>
-            </a:r>
-            <a:pPr algn="l" indent="0" marL="0">
-              <a:lnSpc>
-                <a:spcPts val="1680"/>
-              </a:lnSpc>
-              <a:spcBef>
-                <a:spcPts val="300"/>
-              </a:spcBef>
-              <a:spcAft>
-                <a:spcPts val="300"/>
-              </a:spcAft>
-              <a:buNone/>
-            </a:pPr>
-            <a:r>
-              <a:rPr lang="en-US" sz="1200" dirty="0">
-                <a:solidFill>
-                  <a:srgbClr val="1C2833"/>
-                </a:solidFill>
-                <a:latin typeface="Arial" pitchFamily="34" charset="0"/>
-                <a:ea typeface="Arial" pitchFamily="34" charset="-122"/>
-                <a:cs typeface="Arial" pitchFamily="34" charset="-120"/>
-              </a:rPr>
-              <a:t>quizzes/formative.md</a:t>
-            </a:r>
-            <a:pPr algn="l" indent="0" marL="0">
-              <a:lnSpc>
-                <a:spcPts val="1680"/>
-              </a:lnSpc>
-              <a:spcBef>
-                <a:spcPts val="300"/>
-              </a:spcBef>
-              <a:spcAft>
-                <a:spcPts val="300"/>
-              </a:spcAft>
-              <a:buNone/>
-            </a:pPr>
-            <a:r>
-              <a:rPr lang="en-US" sz="1200" dirty="0">
-                <a:solidFill>
-                  <a:srgbClr val="1C2833"/>
-                </a:solidFill>
-                <a:latin typeface="Arial" pitchFamily="34" charset="0"/>
-                <a:ea typeface="Arial" pitchFamily="34" charset="-122"/>
-                <a:cs typeface="Arial" pitchFamily="34" charset="-120"/>
-              </a:rPr>
-              <a:t> Part B). – Project brief handouts.</a:t>
+              <a:t>By the end of this lesson, students will perform 2 rounds of Sūrya Namaskāra with breath co-ordination (inhale on opening poses, exhale on folding/closing poses), and submit a project plan.</a:t>
             </a:r>
             <a:endParaRPr lang="en-US" sz="1200" dirty="0"/>
           </a:p>
@@ -4293,7 +5499,7 @@
                 <a:ea typeface="Georgia" pitchFamily="34" charset="-122"/>
                 <a:cs typeface="Georgia" pitchFamily="34" charset="-120"/>
               </a:rPr>
-              <a:t>Lesson flow</a:t>
+              <a:t>Materials</a:t>
             </a:r>
             <a:endParaRPr lang="en-US" sz="1800" dirty="0"/>
           </a:p>
@@ -4302,6 +5508,140 @@
       <p:sp>
         <p:nvSpPr>
           <p:cNvPr id="4" name="Text 2"/>
+          <p:cNvSpPr/>
+          <p:nvPr/>
+        </p:nvSpPr>
+        <p:spPr>
+          <a:xfrm>
+            <a:off x="634901" y="883593"/>
+            <a:ext cx="8102798" cy="788491"/>
+          </a:xfrm>
+          <a:prstGeom prst="rect">
+            <a:avLst/>
+          </a:prstGeom>
+          <a:noFill/>
+          <a:ln/>
+        </p:spPr>
+        <p:txBody>
+          <a:bodyPr wrap="square" lIns="0" tIns="0" rIns="0" bIns="0" rtlCol="0" anchor="t"/>
+          <a:lstStyle/>
+          <a:p>
+            <a:pPr algn="l" marL="342900" indent="-342900">
+              <a:lnSpc>
+                <a:spcPts val="1620"/>
+              </a:lnSpc>
+              <a:spcAft>
+                <a:spcPts val="300"/>
+              </a:spcAft>
+              <a:buSzPct val="100000"/>
+              <a:buChar char="•"/>
+            </a:pPr>
+            <a:r>
+              <a:rPr lang="en-US" sz="1200" dirty="0">
+                <a:solidFill>
+                  <a:srgbClr val="1C2833"/>
+                </a:solidFill>
+                <a:latin typeface="Arial" pitchFamily="34" charset="0"/>
+                <a:ea typeface="Arial" pitchFamily="34" charset="-122"/>
+                <a:cs typeface="Arial" pitchFamily="34" charset="-120"/>
+              </a:rPr>
+              <a:t>Mats. Sūrya Namaskāra poster.</a:t>
+            </a:r>
+            <a:endParaRPr lang="en-US" sz="1200" dirty="0"/>
+          </a:p>
+          <a:p>
+            <a:pPr algn="l" marL="342900" indent="-342900">
+              <a:lnSpc>
+                <a:spcPts val="1620"/>
+              </a:lnSpc>
+              <a:spcAft>
+                <a:spcPts val="300"/>
+              </a:spcAft>
+              <a:buSzPct val="100000"/>
+              <a:buChar char="•"/>
+            </a:pPr>
+            <a:r>
+              <a:rPr lang="en-US" sz="1200" dirty="0">
+                <a:solidFill>
+                  <a:srgbClr val="1C2833"/>
+                </a:solidFill>
+                <a:latin typeface="Arial" pitchFamily="34" charset="0"/>
+                <a:ea typeface="Arial" pitchFamily="34" charset="-122"/>
+                <a:cs typeface="Arial" pitchFamily="34" charset="-120"/>
+              </a:rPr>
+              <a:t>Formative quiz (</a:t>
+            </a:r>
+            <a:pPr algn="l" indent="0" marL="0">
+              <a:lnSpc>
+                <a:spcPts val="1620"/>
+              </a:lnSpc>
+              <a:spcAft>
+                <a:spcPts val="300"/>
+              </a:spcAft>
+              <a:buNone/>
+            </a:pPr>
+            <a:r>
+              <a:rPr lang="en-US" sz="1200" dirty="0">
+                <a:solidFill>
+                  <a:srgbClr val="1C2833"/>
+                </a:solidFill>
+                <a:latin typeface="Arial" pitchFamily="34" charset="0"/>
+                <a:ea typeface="Arial" pitchFamily="34" charset="-122"/>
+                <a:cs typeface="Arial" pitchFamily="34" charset="-120"/>
+              </a:rPr>
+              <a:t>quizzes/formative.md</a:t>
+            </a:r>
+            <a:pPr algn="l" indent="0" marL="0">
+              <a:lnSpc>
+                <a:spcPts val="1620"/>
+              </a:lnSpc>
+              <a:spcAft>
+                <a:spcPts val="300"/>
+              </a:spcAft>
+              <a:buNone/>
+            </a:pPr>
+            <a:r>
+              <a:rPr lang="en-US" sz="1200" dirty="0">
+                <a:solidFill>
+                  <a:srgbClr val="1C2833"/>
+                </a:solidFill>
+                <a:latin typeface="Arial" pitchFamily="34" charset="0"/>
+                <a:ea typeface="Arial" pitchFamily="34" charset="-122"/>
+                <a:cs typeface="Arial" pitchFamily="34" charset="-120"/>
+              </a:rPr>
+              <a:t> Part B).</a:t>
+            </a:r>
+            <a:endParaRPr lang="en-US" sz="1200" dirty="0"/>
+          </a:p>
+          <a:p>
+            <a:pPr algn="l" marL="342900" indent="-342900">
+              <a:lnSpc>
+                <a:spcPts val="1620"/>
+              </a:lnSpc>
+              <a:spcAft>
+                <a:spcPts val="300"/>
+              </a:spcAft>
+              <a:buSzPct val="100000"/>
+              <a:buChar char="•"/>
+            </a:pPr>
+            <a:r>
+              <a:rPr lang="en-US" sz="1200" dirty="0">
+                <a:solidFill>
+                  <a:srgbClr val="1C2833"/>
+                </a:solidFill>
+                <a:latin typeface="Arial" pitchFamily="34" charset="0"/>
+                <a:ea typeface="Arial" pitchFamily="34" charset="-122"/>
+                <a:cs typeface="Arial" pitchFamily="34" charset="-120"/>
+              </a:rPr>
+              <a:t>Project brief handouts.</a:t>
+            </a:r>
+            <a:endParaRPr lang="en-US" sz="1200" dirty="0"/>
+          </a:p>
+        </p:txBody>
+      </p:sp>
+      <p:sp>
+        <p:nvSpPr>
+          <p:cNvPr id="5" name="Text 3"/>
           <p:cNvSpPr/>
           <p:nvPr/>
         </p:nvSpPr>
@@ -4451,7 +5791,7 @@
                 <a:ea typeface="Georgia" pitchFamily="34" charset="-122"/>
                 <a:cs typeface="Georgia" pitchFamily="34" charset="-120"/>
               </a:rPr>
-              <a:t>Settle (2 min)</a:t>
+              <a:t>Lesson flow</a:t>
             </a:r>
             <a:endParaRPr lang="en-US" sz="1800" dirty="0"/>
           </a:p>
@@ -4460,54 +5800,6 @@
       <p:sp>
         <p:nvSpPr>
           <p:cNvPr id="4" name="Text 2"/>
-          <p:cNvSpPr/>
-          <p:nvPr/>
-        </p:nvSpPr>
-        <p:spPr>
-          <a:xfrm>
-            <a:off x="406301" y="870942"/>
-            <a:ext cx="8498026" cy="213271"/>
-          </a:xfrm>
-          <a:prstGeom prst="rect">
-            <a:avLst/>
-          </a:prstGeom>
-          <a:noFill/>
-          <a:ln/>
-        </p:spPr>
-        <p:txBody>
-          <a:bodyPr wrap="square" lIns="0" tIns="0" rIns="0" bIns="0" rtlCol="0" anchor="t"/>
-          <a:lstStyle/>
-          <a:p>
-            <a:pPr algn="l" indent="0" marL="0">
-              <a:lnSpc>
-                <a:spcPts val="1680"/>
-              </a:lnSpc>
-              <a:spcBef>
-                <a:spcPts val="300"/>
-              </a:spcBef>
-              <a:spcAft>
-                <a:spcPts val="300"/>
-              </a:spcAft>
-              <a:buNone/>
-            </a:pPr>
-            <a:r>
-              <a:rPr lang="en-US" sz="1200" dirty="0">
-                <a:solidFill>
-                  <a:srgbClr val="1C2833"/>
-                </a:solidFill>
-                <a:latin typeface="Arial" pitchFamily="34" charset="0"/>
-                <a:ea typeface="Arial" pitchFamily="34" charset="-122"/>
-                <a:cs typeface="Arial" pitchFamily="34" charset="-120"/>
-              </a:rPr>
-              <a:t>– Sukhāsana. 5 breaths.</a:t>
-            </a:r>
-            <a:endParaRPr lang="en-US" sz="1200" dirty="0"/>
-          </a:p>
-        </p:txBody>
-      </p:sp>
-      <p:sp>
-        <p:nvSpPr>
-          <p:cNvPr id="5" name="Text 3"/>
           <p:cNvSpPr/>
           <p:nvPr/>
         </p:nvSpPr>
@@ -4657,7 +5949,7 @@
                 <a:ea typeface="Georgia" pitchFamily="34" charset="-122"/>
                 <a:cs typeface="Georgia" pitchFamily="34" charset="-120"/>
               </a:rPr>
-              <a:t>Core (5 min) — The breath pattern</a:t>
+              <a:t>Settle (2 min)</a:t>
             </a:r>
             <a:endParaRPr lang="en-US" sz="1800" dirty="0"/>
           </a:p>
@@ -4671,8 +5963,8 @@
         </p:nvSpPr>
         <p:spPr>
           <a:xfrm>
-            <a:off x="406301" y="870942"/>
-            <a:ext cx="8498026" cy="213271"/>
+            <a:off x="634901" y="883593"/>
+            <a:ext cx="8102798" cy="281880"/>
           </a:xfrm>
           <a:prstGeom prst="rect">
             <a:avLst/>
@@ -4684,17 +5976,15 @@
           <a:bodyPr wrap="square" lIns="0" tIns="0" rIns="0" bIns="0" rtlCol="0" anchor="t"/>
           <a:lstStyle/>
           <a:p>
-            <a:pPr algn="l" indent="0" marL="0">
-              <a:lnSpc>
-                <a:spcPts val="1680"/>
-              </a:lnSpc>
-              <a:spcBef>
-                <a:spcPts val="300"/>
-              </a:spcBef>
-              <a:spcAft>
-                <a:spcPts val="300"/>
-              </a:spcAft>
-              <a:buNone/>
+            <a:pPr algn="l" marL="342900" indent="-342900">
+              <a:lnSpc>
+                <a:spcPts val="1620"/>
+              </a:lnSpc>
+              <a:spcAft>
+                <a:spcPts val="300"/>
+              </a:spcAft>
+              <a:buSzPct val="100000"/>
+              <a:buChar char="•"/>
             </a:pPr>
             <a:r>
               <a:rPr lang="en-US" sz="1200" dirty="0">
@@ -4705,7 +5995,7 @@
                 <a:ea typeface="Arial" pitchFamily="34" charset="-122"/>
                 <a:cs typeface="Arial" pitchFamily="34" charset="-120"/>
               </a:rPr>
-              <a:t>Write on the board:</a:t>
+              <a:t>Sukhāsana. 5 breaths.</a:t>
             </a:r>
             <a:endParaRPr lang="en-US" sz="1200" dirty="0"/>
           </a:p>
@@ -4719,939 +6009,7 @@
         </p:nvSpPr>
         <p:spPr>
           <a:xfrm>
-            <a:off x="406301" y="1160413"/>
-            <a:ext cx="8498026" cy="213271"/>
-          </a:xfrm>
-          <a:prstGeom prst="rect">
-            <a:avLst/>
-          </a:prstGeom>
-          <a:noFill/>
-          <a:ln/>
-        </p:spPr>
-        <p:txBody>
-          <a:bodyPr wrap="square" lIns="0" tIns="0" rIns="0" bIns="0" rtlCol="0" anchor="t"/>
-          <a:lstStyle/>
-          <a:p>
-            <a:pPr algn="l" indent="0" marL="0">
-              <a:lnSpc>
-                <a:spcPts val="1680"/>
-              </a:lnSpc>
-              <a:spcBef>
-                <a:spcPts val="300"/>
-              </a:spcBef>
-              <a:spcAft>
-                <a:spcPts val="300"/>
-              </a:spcAft>
-              <a:buNone/>
-            </a:pPr>
-            <a:r>
-              <a:rPr lang="en-US" sz="1200" i="1" dirty="0">
-                <a:solidFill>
-                  <a:srgbClr val="1C2833"/>
-                </a:solidFill>
-                <a:latin typeface="Arial" pitchFamily="34" charset="0"/>
-                <a:ea typeface="Arial" pitchFamily="34" charset="-122"/>
-                <a:cs typeface="Arial" pitchFamily="34" charset="-120"/>
-              </a:rPr>
-              <a:t>Each row: # · Pose · Breath.</a:t>
-            </a:r>
-            <a:endParaRPr lang="en-US" sz="1200" dirty="0"/>
-          </a:p>
-        </p:txBody>
-      </p:sp>
-      <p:sp>
-        <p:nvSpPr>
-          <p:cNvPr id="6" name="Text 4"/>
-          <p:cNvSpPr/>
-          <p:nvPr/>
-        </p:nvSpPr>
-        <p:spPr>
-          <a:xfrm>
-            <a:off x="634901" y="1462534"/>
-            <a:ext cx="8102798" cy="2963466"/>
-          </a:xfrm>
-          <a:prstGeom prst="rect">
-            <a:avLst/>
-          </a:prstGeom>
-          <a:noFill/>
-          <a:ln/>
-        </p:spPr>
-        <p:txBody>
-          <a:bodyPr wrap="square" lIns="0" tIns="0" rIns="0" bIns="0" rtlCol="0" anchor="t"/>
-          <a:lstStyle/>
-          <a:p>
-            <a:pPr algn="l" marL="342900" indent="-342900">
-              <a:lnSpc>
-                <a:spcPts val="1620"/>
-              </a:lnSpc>
-              <a:spcAft>
-                <a:spcPts val="300"/>
-              </a:spcAft>
-              <a:buSzPct val="100000"/>
-              <a:buChar char="•"/>
-            </a:pPr>
-            <a:r>
-              <a:rPr lang="en-US" sz="1200" b="1" dirty="0">
-                <a:solidFill>
-                  <a:srgbClr val="1C2833"/>
-                </a:solidFill>
-                <a:latin typeface="Arial" pitchFamily="34" charset="0"/>
-                <a:ea typeface="Arial" pitchFamily="34" charset="-122"/>
-                <a:cs typeface="Arial" pitchFamily="34" charset="-120"/>
-              </a:rPr>
-              <a:t>1</a:t>
-            </a:r>
-            <a:pPr algn="l" indent="0" marL="0">
-              <a:lnSpc>
-                <a:spcPts val="1620"/>
-              </a:lnSpc>
-              <a:spcAft>
-                <a:spcPts val="300"/>
-              </a:spcAft>
-              <a:buNone/>
-            </a:pPr>
-            <a:r>
-              <a:rPr lang="en-US" sz="1200" dirty="0">
-                <a:solidFill>
-                  <a:srgbClr val="1C2833"/>
-                </a:solidFill>
-                <a:latin typeface="Arial" pitchFamily="34" charset="0"/>
-                <a:ea typeface="Arial" pitchFamily="34" charset="-122"/>
-                <a:cs typeface="Arial" pitchFamily="34" charset="-120"/>
-              </a:rPr>
-              <a:t> — praṇāmāsana · neutral / exhale</a:t>
-            </a:r>
-            <a:endParaRPr lang="en-US" sz="1200" dirty="0"/>
-          </a:p>
-          <a:p>
-            <a:pPr algn="l" marL="342900" indent="-342900">
-              <a:lnSpc>
-                <a:spcPts val="1620"/>
-              </a:lnSpc>
-              <a:spcAft>
-                <a:spcPts val="300"/>
-              </a:spcAft>
-              <a:buSzPct val="100000"/>
-              <a:buChar char="•"/>
-            </a:pPr>
-            <a:r>
-              <a:rPr lang="en-US" sz="1200" b="1" dirty="0">
-                <a:solidFill>
-                  <a:srgbClr val="1C2833"/>
-                </a:solidFill>
-                <a:latin typeface="Arial" pitchFamily="34" charset="0"/>
-                <a:ea typeface="Arial" pitchFamily="34" charset="-122"/>
-                <a:cs typeface="Arial" pitchFamily="34" charset="-120"/>
-              </a:rPr>
-              <a:t>2</a:t>
-            </a:r>
-            <a:pPr algn="l" indent="0" marL="0">
-              <a:lnSpc>
-                <a:spcPts val="1620"/>
-              </a:lnSpc>
-              <a:spcAft>
-                <a:spcPts val="300"/>
-              </a:spcAft>
-              <a:buNone/>
-            </a:pPr>
-            <a:r>
-              <a:rPr lang="en-US" sz="1200" dirty="0">
-                <a:solidFill>
-                  <a:srgbClr val="1C2833"/>
-                </a:solidFill>
-                <a:latin typeface="Arial" pitchFamily="34" charset="0"/>
-                <a:ea typeface="Arial" pitchFamily="34" charset="-122"/>
-                <a:cs typeface="Arial" pitchFamily="34" charset="-120"/>
-              </a:rPr>
-              <a:t> — hasta-uttānāsana · </a:t>
-            </a:r>
-            <a:pPr algn="l" indent="0" marL="0">
-              <a:lnSpc>
-                <a:spcPts val="1620"/>
-              </a:lnSpc>
-              <a:spcAft>
-                <a:spcPts val="300"/>
-              </a:spcAft>
-              <a:buNone/>
-            </a:pPr>
-            <a:r>
-              <a:rPr lang="en-US" sz="1200" b="1" dirty="0">
-                <a:solidFill>
-                  <a:srgbClr val="1C2833"/>
-                </a:solidFill>
-                <a:latin typeface="Arial" pitchFamily="34" charset="0"/>
-                <a:ea typeface="Arial" pitchFamily="34" charset="-122"/>
-                <a:cs typeface="Arial" pitchFamily="34" charset="-120"/>
-              </a:rPr>
-              <a:t>inhale</a:t>
-            </a:r>
-            <a:endParaRPr lang="en-US" sz="1200" dirty="0"/>
-          </a:p>
-          <a:p>
-            <a:pPr algn="l" marL="342900" indent="-342900">
-              <a:lnSpc>
-                <a:spcPts val="1620"/>
-              </a:lnSpc>
-              <a:spcAft>
-                <a:spcPts val="300"/>
-              </a:spcAft>
-              <a:buSzPct val="100000"/>
-              <a:buChar char="•"/>
-            </a:pPr>
-            <a:r>
-              <a:rPr lang="en-US" sz="1200" b="1" dirty="0">
-                <a:solidFill>
-                  <a:srgbClr val="1C2833"/>
-                </a:solidFill>
-                <a:latin typeface="Arial" pitchFamily="34" charset="0"/>
-                <a:ea typeface="Arial" pitchFamily="34" charset="-122"/>
-                <a:cs typeface="Arial" pitchFamily="34" charset="-120"/>
-              </a:rPr>
-              <a:t>3</a:t>
-            </a:r>
-            <a:pPr algn="l" indent="0" marL="0">
-              <a:lnSpc>
-                <a:spcPts val="1620"/>
-              </a:lnSpc>
-              <a:spcAft>
-                <a:spcPts val="300"/>
-              </a:spcAft>
-              <a:buNone/>
-            </a:pPr>
-            <a:r>
-              <a:rPr lang="en-US" sz="1200" dirty="0">
-                <a:solidFill>
-                  <a:srgbClr val="1C2833"/>
-                </a:solidFill>
-                <a:latin typeface="Arial" pitchFamily="34" charset="0"/>
-                <a:ea typeface="Arial" pitchFamily="34" charset="-122"/>
-                <a:cs typeface="Arial" pitchFamily="34" charset="-120"/>
-              </a:rPr>
-              <a:t> — uttānāsana · </a:t>
-            </a:r>
-            <a:pPr algn="l" indent="0" marL="0">
-              <a:lnSpc>
-                <a:spcPts val="1620"/>
-              </a:lnSpc>
-              <a:spcAft>
-                <a:spcPts val="300"/>
-              </a:spcAft>
-              <a:buNone/>
-            </a:pPr>
-            <a:r>
-              <a:rPr lang="en-US" sz="1200" b="1" dirty="0">
-                <a:solidFill>
-                  <a:srgbClr val="1C2833"/>
-                </a:solidFill>
-                <a:latin typeface="Arial" pitchFamily="34" charset="0"/>
-                <a:ea typeface="Arial" pitchFamily="34" charset="-122"/>
-                <a:cs typeface="Arial" pitchFamily="34" charset="-120"/>
-              </a:rPr>
-              <a:t>exhale</a:t>
-            </a:r>
-            <a:endParaRPr lang="en-US" sz="1200" dirty="0"/>
-          </a:p>
-          <a:p>
-            <a:pPr algn="l" marL="342900" indent="-342900">
-              <a:lnSpc>
-                <a:spcPts val="1620"/>
-              </a:lnSpc>
-              <a:spcAft>
-                <a:spcPts val="300"/>
-              </a:spcAft>
-              <a:buSzPct val="100000"/>
-              <a:buChar char="•"/>
-            </a:pPr>
-            <a:r>
-              <a:rPr lang="en-US" sz="1200" b="1" dirty="0">
-                <a:solidFill>
-                  <a:srgbClr val="1C2833"/>
-                </a:solidFill>
-                <a:latin typeface="Arial" pitchFamily="34" charset="0"/>
-                <a:ea typeface="Arial" pitchFamily="34" charset="-122"/>
-                <a:cs typeface="Arial" pitchFamily="34" charset="-120"/>
-              </a:rPr>
-              <a:t>4</a:t>
-            </a:r>
-            <a:pPr algn="l" indent="0" marL="0">
-              <a:lnSpc>
-                <a:spcPts val="1620"/>
-              </a:lnSpc>
-              <a:spcAft>
-                <a:spcPts val="300"/>
-              </a:spcAft>
-              <a:buNone/>
-            </a:pPr>
-            <a:r>
-              <a:rPr lang="en-US" sz="1200" dirty="0">
-                <a:solidFill>
-                  <a:srgbClr val="1C2833"/>
-                </a:solidFill>
-                <a:latin typeface="Arial" pitchFamily="34" charset="0"/>
-                <a:ea typeface="Arial" pitchFamily="34" charset="-122"/>
-                <a:cs typeface="Arial" pitchFamily="34" charset="-120"/>
-              </a:rPr>
-              <a:t> — aśva-sañcalanāsana · </a:t>
-            </a:r>
-            <a:pPr algn="l" indent="0" marL="0">
-              <a:lnSpc>
-                <a:spcPts val="1620"/>
-              </a:lnSpc>
-              <a:spcAft>
-                <a:spcPts val="300"/>
-              </a:spcAft>
-              <a:buNone/>
-            </a:pPr>
-            <a:r>
-              <a:rPr lang="en-US" sz="1200" b="1" dirty="0">
-                <a:solidFill>
-                  <a:srgbClr val="1C2833"/>
-                </a:solidFill>
-                <a:latin typeface="Arial" pitchFamily="34" charset="0"/>
-                <a:ea typeface="Arial" pitchFamily="34" charset="-122"/>
-                <a:cs typeface="Arial" pitchFamily="34" charset="-120"/>
-              </a:rPr>
-              <a:t>inhale</a:t>
-            </a:r>
-            <a:endParaRPr lang="en-US" sz="1200" dirty="0"/>
-          </a:p>
-          <a:p>
-            <a:pPr algn="l" marL="342900" indent="-342900">
-              <a:lnSpc>
-                <a:spcPts val="1620"/>
-              </a:lnSpc>
-              <a:spcAft>
-                <a:spcPts val="300"/>
-              </a:spcAft>
-              <a:buSzPct val="100000"/>
-              <a:buChar char="•"/>
-            </a:pPr>
-            <a:r>
-              <a:rPr lang="en-US" sz="1200" b="1" dirty="0">
-                <a:solidFill>
-                  <a:srgbClr val="1C2833"/>
-                </a:solidFill>
-                <a:latin typeface="Arial" pitchFamily="34" charset="0"/>
-                <a:ea typeface="Arial" pitchFamily="34" charset="-122"/>
-                <a:cs typeface="Arial" pitchFamily="34" charset="-120"/>
-              </a:rPr>
-              <a:t>5</a:t>
-            </a:r>
-            <a:pPr algn="l" indent="0" marL="0">
-              <a:lnSpc>
-                <a:spcPts val="1620"/>
-              </a:lnSpc>
-              <a:spcAft>
-                <a:spcPts val="300"/>
-              </a:spcAft>
-              <a:buNone/>
-            </a:pPr>
-            <a:r>
-              <a:rPr lang="en-US" sz="1200" dirty="0">
-                <a:solidFill>
-                  <a:srgbClr val="1C2833"/>
-                </a:solidFill>
-                <a:latin typeface="Arial" pitchFamily="34" charset="0"/>
-                <a:ea typeface="Arial" pitchFamily="34" charset="-122"/>
-                <a:cs typeface="Arial" pitchFamily="34" charset="-120"/>
-              </a:rPr>
-              <a:t> — adho-mukha-śvānāsana · </a:t>
-            </a:r>
-            <a:pPr algn="l" indent="0" marL="0">
-              <a:lnSpc>
-                <a:spcPts val="1620"/>
-              </a:lnSpc>
-              <a:spcAft>
-                <a:spcPts val="300"/>
-              </a:spcAft>
-              <a:buNone/>
-            </a:pPr>
-            <a:r>
-              <a:rPr lang="en-US" sz="1200" b="1" dirty="0">
-                <a:solidFill>
-                  <a:srgbClr val="1C2833"/>
-                </a:solidFill>
-                <a:latin typeface="Arial" pitchFamily="34" charset="0"/>
-                <a:ea typeface="Arial" pitchFamily="34" charset="-122"/>
-                <a:cs typeface="Arial" pitchFamily="34" charset="-120"/>
-              </a:rPr>
-              <a:t>exhale</a:t>
-            </a:r>
-            <a:endParaRPr lang="en-US" sz="1200" dirty="0"/>
-          </a:p>
-          <a:p>
-            <a:pPr algn="l" marL="342900" indent="-342900">
-              <a:lnSpc>
-                <a:spcPts val="1620"/>
-              </a:lnSpc>
-              <a:spcAft>
-                <a:spcPts val="300"/>
-              </a:spcAft>
-              <a:buSzPct val="100000"/>
-              <a:buChar char="•"/>
-            </a:pPr>
-            <a:r>
-              <a:rPr lang="en-US" sz="1200" b="1" dirty="0">
-                <a:solidFill>
-                  <a:srgbClr val="1C2833"/>
-                </a:solidFill>
-                <a:latin typeface="Arial" pitchFamily="34" charset="0"/>
-                <a:ea typeface="Arial" pitchFamily="34" charset="-122"/>
-                <a:cs typeface="Arial" pitchFamily="34" charset="-120"/>
-              </a:rPr>
-              <a:t>6</a:t>
-            </a:r>
-            <a:pPr algn="l" indent="0" marL="0">
-              <a:lnSpc>
-                <a:spcPts val="1620"/>
-              </a:lnSpc>
-              <a:spcAft>
-                <a:spcPts val="300"/>
-              </a:spcAft>
-              <a:buNone/>
-            </a:pPr>
-            <a:r>
-              <a:rPr lang="en-US" sz="1200" dirty="0">
-                <a:solidFill>
-                  <a:srgbClr val="1C2833"/>
-                </a:solidFill>
-                <a:latin typeface="Arial" pitchFamily="34" charset="0"/>
-                <a:ea typeface="Arial" pitchFamily="34" charset="-122"/>
-                <a:cs typeface="Arial" pitchFamily="34" charset="-120"/>
-              </a:rPr>
-              <a:t> — aṣṭāṅga-namaskāra · </a:t>
-            </a:r>
-            <a:pPr algn="l" indent="0" marL="0">
-              <a:lnSpc>
-                <a:spcPts val="1620"/>
-              </a:lnSpc>
-              <a:spcAft>
-                <a:spcPts val="300"/>
-              </a:spcAft>
-              <a:buNone/>
-            </a:pPr>
-            <a:r>
-              <a:rPr lang="en-US" sz="1200" b="1" dirty="0">
-                <a:solidFill>
-                  <a:srgbClr val="1C2833"/>
-                </a:solidFill>
-                <a:latin typeface="Arial" pitchFamily="34" charset="0"/>
-                <a:ea typeface="Arial" pitchFamily="34" charset="-122"/>
-                <a:cs typeface="Arial" pitchFamily="34" charset="-120"/>
-              </a:rPr>
-              <a:t>hold</a:t>
-            </a:r>
-            <a:pPr algn="l" indent="0" marL="0">
-              <a:lnSpc>
-                <a:spcPts val="1620"/>
-              </a:lnSpc>
-              <a:spcAft>
-                <a:spcPts val="300"/>
-              </a:spcAft>
-              <a:buNone/>
-            </a:pPr>
-            <a:r>
-              <a:rPr lang="en-US" sz="1200" dirty="0">
-                <a:solidFill>
-                  <a:srgbClr val="1C2833"/>
-                </a:solidFill>
-                <a:latin typeface="Arial" pitchFamily="34" charset="0"/>
-                <a:ea typeface="Arial" pitchFamily="34" charset="-122"/>
-                <a:cs typeface="Arial" pitchFamily="34" charset="-120"/>
-              </a:rPr>
-              <a:t> breath out (very brief)</a:t>
-            </a:r>
-            <a:endParaRPr lang="en-US" sz="1200" dirty="0"/>
-          </a:p>
-          <a:p>
-            <a:pPr algn="l" marL="342900" indent="-342900">
-              <a:lnSpc>
-                <a:spcPts val="1620"/>
-              </a:lnSpc>
-              <a:spcAft>
-                <a:spcPts val="300"/>
-              </a:spcAft>
-              <a:buSzPct val="100000"/>
-              <a:buChar char="•"/>
-            </a:pPr>
-            <a:r>
-              <a:rPr lang="en-US" sz="1200" b="1" dirty="0">
-                <a:solidFill>
-                  <a:srgbClr val="1C2833"/>
-                </a:solidFill>
-                <a:latin typeface="Arial" pitchFamily="34" charset="0"/>
-                <a:ea typeface="Arial" pitchFamily="34" charset="-122"/>
-                <a:cs typeface="Arial" pitchFamily="34" charset="-120"/>
-              </a:rPr>
-              <a:t>7</a:t>
-            </a:r>
-            <a:pPr algn="l" indent="0" marL="0">
-              <a:lnSpc>
-                <a:spcPts val="1620"/>
-              </a:lnSpc>
-              <a:spcAft>
-                <a:spcPts val="300"/>
-              </a:spcAft>
-              <a:buNone/>
-            </a:pPr>
-            <a:r>
-              <a:rPr lang="en-US" sz="1200" dirty="0">
-                <a:solidFill>
-                  <a:srgbClr val="1C2833"/>
-                </a:solidFill>
-                <a:latin typeface="Arial" pitchFamily="34" charset="0"/>
-                <a:ea typeface="Arial" pitchFamily="34" charset="-122"/>
-                <a:cs typeface="Arial" pitchFamily="34" charset="-120"/>
-              </a:rPr>
-              <a:t> — bhujaṅgāsana · </a:t>
-            </a:r>
-            <a:pPr algn="l" indent="0" marL="0">
-              <a:lnSpc>
-                <a:spcPts val="1620"/>
-              </a:lnSpc>
-              <a:spcAft>
-                <a:spcPts val="300"/>
-              </a:spcAft>
-              <a:buNone/>
-            </a:pPr>
-            <a:r>
-              <a:rPr lang="en-US" sz="1200" b="1" dirty="0">
-                <a:solidFill>
-                  <a:srgbClr val="1C2833"/>
-                </a:solidFill>
-                <a:latin typeface="Arial" pitchFamily="34" charset="0"/>
-                <a:ea typeface="Arial" pitchFamily="34" charset="-122"/>
-                <a:cs typeface="Arial" pitchFamily="34" charset="-120"/>
-              </a:rPr>
-              <a:t>inhale</a:t>
-            </a:r>
-            <a:endParaRPr lang="en-US" sz="1200" dirty="0"/>
-          </a:p>
-          <a:p>
-            <a:pPr algn="l" marL="342900" indent="-342900">
-              <a:lnSpc>
-                <a:spcPts val="1620"/>
-              </a:lnSpc>
-              <a:spcAft>
-                <a:spcPts val="300"/>
-              </a:spcAft>
-              <a:buSzPct val="100000"/>
-              <a:buChar char="•"/>
-            </a:pPr>
-            <a:r>
-              <a:rPr lang="en-US" sz="1200" b="1" dirty="0">
-                <a:solidFill>
-                  <a:srgbClr val="1C2833"/>
-                </a:solidFill>
-                <a:latin typeface="Arial" pitchFamily="34" charset="0"/>
-                <a:ea typeface="Arial" pitchFamily="34" charset="-122"/>
-                <a:cs typeface="Arial" pitchFamily="34" charset="-120"/>
-              </a:rPr>
-              <a:t>8</a:t>
-            </a:r>
-            <a:pPr algn="l" indent="0" marL="0">
-              <a:lnSpc>
-                <a:spcPts val="1620"/>
-              </a:lnSpc>
-              <a:spcAft>
-                <a:spcPts val="300"/>
-              </a:spcAft>
-              <a:buNone/>
-            </a:pPr>
-            <a:r>
-              <a:rPr lang="en-US" sz="1200" dirty="0">
-                <a:solidFill>
-                  <a:srgbClr val="1C2833"/>
-                </a:solidFill>
-                <a:latin typeface="Arial" pitchFamily="34" charset="0"/>
-                <a:ea typeface="Arial" pitchFamily="34" charset="-122"/>
-                <a:cs typeface="Arial" pitchFamily="34" charset="-120"/>
-              </a:rPr>
-              <a:t> — adho-mukha-śvānāsana · </a:t>
-            </a:r>
-            <a:pPr algn="l" indent="0" marL="0">
-              <a:lnSpc>
-                <a:spcPts val="1620"/>
-              </a:lnSpc>
-              <a:spcAft>
-                <a:spcPts val="300"/>
-              </a:spcAft>
-              <a:buNone/>
-            </a:pPr>
-            <a:r>
-              <a:rPr lang="en-US" sz="1200" b="1" dirty="0">
-                <a:solidFill>
-                  <a:srgbClr val="1C2833"/>
-                </a:solidFill>
-                <a:latin typeface="Arial" pitchFamily="34" charset="0"/>
-                <a:ea typeface="Arial" pitchFamily="34" charset="-122"/>
-                <a:cs typeface="Arial" pitchFamily="34" charset="-120"/>
-              </a:rPr>
-              <a:t>exhale</a:t>
-            </a:r>
-            <a:endParaRPr lang="en-US" sz="1200" dirty="0"/>
-          </a:p>
-          <a:p>
-            <a:pPr algn="l" marL="342900" indent="-342900">
-              <a:lnSpc>
-                <a:spcPts val="1620"/>
-              </a:lnSpc>
-              <a:spcAft>
-                <a:spcPts val="300"/>
-              </a:spcAft>
-              <a:buSzPct val="100000"/>
-              <a:buChar char="•"/>
-            </a:pPr>
-            <a:r>
-              <a:rPr lang="en-US" sz="1200" b="1" dirty="0">
-                <a:solidFill>
-                  <a:srgbClr val="1C2833"/>
-                </a:solidFill>
-                <a:latin typeface="Arial" pitchFamily="34" charset="0"/>
-                <a:ea typeface="Arial" pitchFamily="34" charset="-122"/>
-                <a:cs typeface="Arial" pitchFamily="34" charset="-120"/>
-              </a:rPr>
-              <a:t>9</a:t>
-            </a:r>
-            <a:pPr algn="l" indent="0" marL="0">
-              <a:lnSpc>
-                <a:spcPts val="1620"/>
-              </a:lnSpc>
-              <a:spcAft>
-                <a:spcPts val="300"/>
-              </a:spcAft>
-              <a:buNone/>
-            </a:pPr>
-            <a:r>
-              <a:rPr lang="en-US" sz="1200" dirty="0">
-                <a:solidFill>
-                  <a:srgbClr val="1C2833"/>
-                </a:solidFill>
-                <a:latin typeface="Arial" pitchFamily="34" charset="0"/>
-                <a:ea typeface="Arial" pitchFamily="34" charset="-122"/>
-                <a:cs typeface="Arial" pitchFamily="34" charset="-120"/>
-              </a:rPr>
-              <a:t> — aśva-sañcalanāsana · </a:t>
-            </a:r>
-            <a:pPr algn="l" indent="0" marL="0">
-              <a:lnSpc>
-                <a:spcPts val="1620"/>
-              </a:lnSpc>
-              <a:spcAft>
-                <a:spcPts val="300"/>
-              </a:spcAft>
-              <a:buNone/>
-            </a:pPr>
-            <a:r>
-              <a:rPr lang="en-US" sz="1200" b="1" dirty="0">
-                <a:solidFill>
-                  <a:srgbClr val="1C2833"/>
-                </a:solidFill>
-                <a:latin typeface="Arial" pitchFamily="34" charset="0"/>
-                <a:ea typeface="Arial" pitchFamily="34" charset="-122"/>
-                <a:cs typeface="Arial" pitchFamily="34" charset="-120"/>
-              </a:rPr>
-              <a:t>inhale</a:t>
-            </a:r>
-            <a:endParaRPr lang="en-US" sz="1200" dirty="0"/>
-          </a:p>
-          <a:p>
-            <a:pPr algn="l" marL="342900" indent="-342900">
-              <a:lnSpc>
-                <a:spcPts val="1620"/>
-              </a:lnSpc>
-              <a:spcAft>
-                <a:spcPts val="300"/>
-              </a:spcAft>
-              <a:buSzPct val="100000"/>
-              <a:buChar char="•"/>
-            </a:pPr>
-            <a:r>
-              <a:rPr lang="en-US" sz="1200" b="1" dirty="0">
-                <a:solidFill>
-                  <a:srgbClr val="1C2833"/>
-                </a:solidFill>
-                <a:latin typeface="Arial" pitchFamily="34" charset="0"/>
-                <a:ea typeface="Arial" pitchFamily="34" charset="-122"/>
-                <a:cs typeface="Arial" pitchFamily="34" charset="-120"/>
-              </a:rPr>
-              <a:t>10</a:t>
-            </a:r>
-            <a:pPr algn="l" indent="0" marL="0">
-              <a:lnSpc>
-                <a:spcPts val="1620"/>
-              </a:lnSpc>
-              <a:spcAft>
-                <a:spcPts val="300"/>
-              </a:spcAft>
-              <a:buNone/>
-            </a:pPr>
-            <a:r>
-              <a:rPr lang="en-US" sz="1200" dirty="0">
-                <a:solidFill>
-                  <a:srgbClr val="1C2833"/>
-                </a:solidFill>
-                <a:latin typeface="Arial" pitchFamily="34" charset="0"/>
-                <a:ea typeface="Arial" pitchFamily="34" charset="-122"/>
-                <a:cs typeface="Arial" pitchFamily="34" charset="-120"/>
-              </a:rPr>
-              <a:t> — uttānāsana · </a:t>
-            </a:r>
-            <a:pPr algn="l" indent="0" marL="0">
-              <a:lnSpc>
-                <a:spcPts val="1620"/>
-              </a:lnSpc>
-              <a:spcAft>
-                <a:spcPts val="300"/>
-              </a:spcAft>
-              <a:buNone/>
-            </a:pPr>
-            <a:r>
-              <a:rPr lang="en-US" sz="1200" b="1" dirty="0">
-                <a:solidFill>
-                  <a:srgbClr val="1C2833"/>
-                </a:solidFill>
-                <a:latin typeface="Arial" pitchFamily="34" charset="0"/>
-                <a:ea typeface="Arial" pitchFamily="34" charset="-122"/>
-                <a:cs typeface="Arial" pitchFamily="34" charset="-120"/>
-              </a:rPr>
-              <a:t>exhale</a:t>
-            </a:r>
-            <a:endParaRPr lang="en-US" sz="1200" dirty="0"/>
-          </a:p>
-          <a:p>
-            <a:pPr algn="l" marL="342900" indent="-342900">
-              <a:lnSpc>
-                <a:spcPts val="1620"/>
-              </a:lnSpc>
-              <a:spcAft>
-                <a:spcPts val="300"/>
-              </a:spcAft>
-              <a:buSzPct val="100000"/>
-              <a:buChar char="•"/>
-            </a:pPr>
-            <a:r>
-              <a:rPr lang="en-US" sz="1200" b="1" dirty="0">
-                <a:solidFill>
-                  <a:srgbClr val="1C2833"/>
-                </a:solidFill>
-                <a:latin typeface="Arial" pitchFamily="34" charset="0"/>
-                <a:ea typeface="Arial" pitchFamily="34" charset="-122"/>
-                <a:cs typeface="Arial" pitchFamily="34" charset="-120"/>
-              </a:rPr>
-              <a:t>11</a:t>
-            </a:r>
-            <a:pPr algn="l" indent="0" marL="0">
-              <a:lnSpc>
-                <a:spcPts val="1620"/>
-              </a:lnSpc>
-              <a:spcAft>
-                <a:spcPts val="300"/>
-              </a:spcAft>
-              <a:buNone/>
-            </a:pPr>
-            <a:r>
-              <a:rPr lang="en-US" sz="1200" dirty="0">
-                <a:solidFill>
-                  <a:srgbClr val="1C2833"/>
-                </a:solidFill>
-                <a:latin typeface="Arial" pitchFamily="34" charset="0"/>
-                <a:ea typeface="Arial" pitchFamily="34" charset="-122"/>
-                <a:cs typeface="Arial" pitchFamily="34" charset="-120"/>
-              </a:rPr>
-              <a:t> — hasta-uttānāsana · </a:t>
-            </a:r>
-            <a:pPr algn="l" indent="0" marL="0">
-              <a:lnSpc>
-                <a:spcPts val="1620"/>
-              </a:lnSpc>
-              <a:spcAft>
-                <a:spcPts val="300"/>
-              </a:spcAft>
-              <a:buNone/>
-            </a:pPr>
-            <a:r>
-              <a:rPr lang="en-US" sz="1200" b="1" dirty="0">
-                <a:solidFill>
-                  <a:srgbClr val="1C2833"/>
-                </a:solidFill>
-                <a:latin typeface="Arial" pitchFamily="34" charset="0"/>
-                <a:ea typeface="Arial" pitchFamily="34" charset="-122"/>
-                <a:cs typeface="Arial" pitchFamily="34" charset="-120"/>
-              </a:rPr>
-              <a:t>inhale</a:t>
-            </a:r>
-            <a:endParaRPr lang="en-US" sz="1200" dirty="0"/>
-          </a:p>
-          <a:p>
-            <a:pPr algn="l" marL="342900" indent="-342900">
-              <a:lnSpc>
-                <a:spcPts val="1620"/>
-              </a:lnSpc>
-              <a:spcAft>
-                <a:spcPts val="300"/>
-              </a:spcAft>
-              <a:buSzPct val="100000"/>
-              <a:buChar char="•"/>
-            </a:pPr>
-            <a:r>
-              <a:rPr lang="en-US" sz="1200" b="1" dirty="0">
-                <a:solidFill>
-                  <a:srgbClr val="1C2833"/>
-                </a:solidFill>
-                <a:latin typeface="Arial" pitchFamily="34" charset="0"/>
-                <a:ea typeface="Arial" pitchFamily="34" charset="-122"/>
-                <a:cs typeface="Arial" pitchFamily="34" charset="-120"/>
-              </a:rPr>
-              <a:t>12</a:t>
-            </a:r>
-            <a:pPr algn="l" indent="0" marL="0">
-              <a:lnSpc>
-                <a:spcPts val="1620"/>
-              </a:lnSpc>
-              <a:spcAft>
-                <a:spcPts val="300"/>
-              </a:spcAft>
-              <a:buNone/>
-            </a:pPr>
-            <a:r>
-              <a:rPr lang="en-US" sz="1200" dirty="0">
-                <a:solidFill>
-                  <a:srgbClr val="1C2833"/>
-                </a:solidFill>
-                <a:latin typeface="Arial" pitchFamily="34" charset="0"/>
-                <a:ea typeface="Arial" pitchFamily="34" charset="-122"/>
-                <a:cs typeface="Arial" pitchFamily="34" charset="-120"/>
-              </a:rPr>
-              <a:t> — praṇāmāsana · </a:t>
-            </a:r>
-            <a:pPr algn="l" indent="0" marL="0">
-              <a:lnSpc>
-                <a:spcPts val="1620"/>
-              </a:lnSpc>
-              <a:spcAft>
-                <a:spcPts val="300"/>
-              </a:spcAft>
-              <a:buNone/>
-            </a:pPr>
-            <a:r>
-              <a:rPr lang="en-US" sz="1200" b="1" dirty="0">
-                <a:solidFill>
-                  <a:srgbClr val="1C2833"/>
-                </a:solidFill>
-                <a:latin typeface="Arial" pitchFamily="34" charset="0"/>
-                <a:ea typeface="Arial" pitchFamily="34" charset="-122"/>
-                <a:cs typeface="Arial" pitchFamily="34" charset="-120"/>
-              </a:rPr>
-              <a:t>exhale</a:t>
-            </a:r>
-            <a:endParaRPr lang="en-US" sz="1200" dirty="0"/>
-          </a:p>
-        </p:txBody>
-      </p:sp>
-      <p:sp>
-        <p:nvSpPr>
-          <p:cNvPr id="7" name="Text 5"/>
-          <p:cNvSpPr/>
-          <p:nvPr/>
-        </p:nvSpPr>
-        <p:spPr>
-          <a:xfrm>
-            <a:off x="406301" y="4514850"/>
-            <a:ext cx="8498026" cy="213271"/>
-          </a:xfrm>
-          <a:prstGeom prst="rect">
-            <a:avLst/>
-          </a:prstGeom>
-          <a:noFill/>
-          <a:ln/>
-        </p:spPr>
-        <p:txBody>
-          <a:bodyPr wrap="square" lIns="0" tIns="0" rIns="0" bIns="0" rtlCol="0" anchor="t"/>
-          <a:lstStyle/>
-          <a:p>
-            <a:pPr algn="l" indent="0" marL="0">
-              <a:lnSpc>
-                <a:spcPts val="1680"/>
-              </a:lnSpc>
-              <a:spcBef>
-                <a:spcPts val="300"/>
-              </a:spcBef>
-              <a:spcAft>
-                <a:spcPts val="300"/>
-              </a:spcAft>
-              <a:buNone/>
-            </a:pPr>
-            <a:r>
-              <a:rPr lang="en-US" sz="1200" b="1" dirty="0">
-                <a:solidFill>
-                  <a:srgbClr val="1C2833"/>
-                </a:solidFill>
-                <a:latin typeface="Arial" pitchFamily="34" charset="0"/>
-                <a:ea typeface="Arial" pitchFamily="34" charset="-122"/>
-                <a:cs typeface="Arial" pitchFamily="34" charset="-120"/>
-              </a:rPr>
-              <a:t>Pattern to notice:</a:t>
-            </a:r>
-            <a:pPr algn="l" indent="0" marL="0">
-              <a:lnSpc>
-                <a:spcPts val="1680"/>
-              </a:lnSpc>
-              <a:spcBef>
-                <a:spcPts val="300"/>
-              </a:spcBef>
-              <a:spcAft>
-                <a:spcPts val="300"/>
-              </a:spcAft>
-              <a:buNone/>
-            </a:pPr>
-            <a:r>
-              <a:rPr lang="en-US" sz="1200" dirty="0">
-                <a:solidFill>
-                  <a:srgbClr val="1C2833"/>
-                </a:solidFill>
-                <a:latin typeface="Arial" pitchFamily="34" charset="0"/>
-                <a:ea typeface="Arial" pitchFamily="34" charset="-122"/>
-                <a:cs typeface="Arial" pitchFamily="34" charset="-120"/>
-              </a:rPr>
-              <a:t> </a:t>
-            </a:r>
-            <a:pPr algn="l" indent="0" marL="0">
-              <a:lnSpc>
-                <a:spcPts val="1680"/>
-              </a:lnSpc>
-              <a:spcBef>
-                <a:spcPts val="300"/>
-              </a:spcBef>
-              <a:spcAft>
-                <a:spcPts val="300"/>
-              </a:spcAft>
-              <a:buNone/>
-            </a:pPr>
-            <a:r>
-              <a:rPr lang="en-US" sz="1200" i="1" dirty="0">
-                <a:solidFill>
-                  <a:srgbClr val="1C2833"/>
-                </a:solidFill>
-                <a:latin typeface="Arial" pitchFamily="34" charset="0"/>
-                <a:ea typeface="Arial" pitchFamily="34" charset="-122"/>
-                <a:cs typeface="Arial" pitchFamily="34" charset="-120"/>
-              </a:rPr>
-              <a:t>open the body = inhale; fold or close the body = exhale.</a:t>
-            </a:r>
-            <a:endParaRPr lang="en-US" sz="1200" dirty="0"/>
-          </a:p>
-        </p:txBody>
-      </p:sp>
-      <p:sp>
-        <p:nvSpPr>
-          <p:cNvPr id="8" name="Text 6"/>
-          <p:cNvSpPr/>
-          <p:nvPr/>
-        </p:nvSpPr>
-        <p:spPr>
-          <a:xfrm>
-            <a:off x="406301" y="4880521"/>
+            <a:off x="406301" y="4434929"/>
             <a:ext cx="8498026" cy="213271"/>
           </a:xfrm>
           <a:prstGeom prst="rect">
@@ -5795,7 +6153,7 @@
                 <a:ea typeface="Georgia" pitchFamily="34" charset="-122"/>
                 <a:cs typeface="Georgia" pitchFamily="34" charset="-120"/>
               </a:rPr>
-              <a:t>Practice (15 min) — 2 rounds with breath</a:t>
+              <a:t>Core (5 min) — The breath pattern</a:t>
             </a:r>
             <a:endParaRPr lang="en-US" sz="1800" dirty="0"/>
           </a:p>
@@ -5810,7 +6168,7 @@
         <p:spPr>
           <a:xfrm>
             <a:off x="406301" y="870942"/>
-            <a:ext cx="8498026" cy="426541"/>
+            <a:ext cx="8498026" cy="213271"/>
           </a:xfrm>
           <a:prstGeom prst="rect">
             <a:avLst/>
@@ -5843,7 +6201,7 @@
                 <a:ea typeface="Arial" pitchFamily="34" charset="-122"/>
                 <a:cs typeface="Arial" pitchFamily="34" charset="-120"/>
               </a:rPr>
-              <a:t>– 5 min: walk through 1 round at slow pace, teacher calling each pose AND each breath. – 5 min: students do 1 round at their own pace, focused on breath. – 5 min: 1 more round, slightly faster, breath leading the movement.</a:t>
+              <a:t>Write on the board:</a:t>
             </a:r>
             <a:endParaRPr lang="en-US" sz="1200" dirty="0"/>
           </a:p>
@@ -5857,7 +6215,7 @@
         </p:nvSpPr>
         <p:spPr>
           <a:xfrm>
-            <a:off x="406301" y="1373684"/>
+            <a:off x="406301" y="1160413"/>
             <a:ext cx="8498026" cy="213271"/>
           </a:xfrm>
           <a:prstGeom prst="rect">
@@ -5883,61 +6241,15 @@
               <a:buNone/>
             </a:pPr>
             <a:r>
-              <a:rPr lang="en-US" sz="1200" dirty="0">
-                <a:solidFill>
-                  <a:srgbClr val="1C2833"/>
-                </a:solidFill>
-                <a:latin typeface="Arial" pitchFamily="34" charset="0"/>
-                <a:ea typeface="Arial" pitchFamily="34" charset="-122"/>
-                <a:cs typeface="Arial" pitchFamily="34" charset="-120"/>
-              </a:rPr>
-              <a:t>Two rounds total. </a:t>
-            </a:r>
-            <a:pPr algn="l" indent="0" marL="0">
-              <a:lnSpc>
-                <a:spcPts val="1680"/>
-              </a:lnSpc>
-              <a:spcBef>
-                <a:spcPts val="300"/>
-              </a:spcBef>
-              <a:spcAft>
-                <a:spcPts val="300"/>
-              </a:spcAft>
-              <a:buNone/>
-            </a:pPr>
-            <a:r>
-              <a:rPr lang="en-US" sz="1200" b="1" dirty="0">
-                <a:solidFill>
-                  <a:srgbClr val="1C2833"/>
-                </a:solidFill>
-                <a:latin typeface="Arial" pitchFamily="34" charset="0"/>
-                <a:ea typeface="Arial" pitchFamily="34" charset="-122"/>
-                <a:cs typeface="Arial" pitchFamily="34" charset="-120"/>
-              </a:rPr>
-              <a:t>Do not exceed 3 rounds at this band.</a:t>
-            </a:r>
-            <a:pPr algn="l" indent="0" marL="0">
-              <a:lnSpc>
-                <a:spcPts val="1680"/>
-              </a:lnSpc>
-              <a:spcBef>
-                <a:spcPts val="300"/>
-              </a:spcBef>
-              <a:spcAft>
-                <a:spcPts val="300"/>
-              </a:spcAft>
-              <a:buNone/>
-            </a:pPr>
-            <a:r>
-              <a:rPr lang="en-US" sz="1200" dirty="0">
-                <a:solidFill>
-                  <a:srgbClr val="1C2833"/>
-                </a:solidFill>
-                <a:latin typeface="Arial" pitchFamily="34" charset="0"/>
-                <a:ea typeface="Arial" pitchFamily="34" charset="-122"/>
-                <a:cs typeface="Arial" pitchFamily="34" charset="-120"/>
-              </a:rPr>
-              <a:t> Quality over quantity.</a:t>
+              <a:rPr lang="en-US" sz="1200" i="1" dirty="0">
+                <a:solidFill>
+                  <a:srgbClr val="1C2833"/>
+                </a:solidFill>
+                <a:latin typeface="Arial" pitchFamily="34" charset="0"/>
+                <a:ea typeface="Arial" pitchFamily="34" charset="-122"/>
+                <a:cs typeface="Arial" pitchFamily="34" charset="-120"/>
+              </a:rPr>
+              <a:t>Each row: # · Pose · Breath.</a:t>
             </a:r>
             <a:endParaRPr lang="en-US" sz="1200" dirty="0"/>
           </a:p>
@@ -5946,100 +6258,6 @@
       <p:sp>
         <p:nvSpPr>
           <p:cNvPr id="6" name="Text 4"/>
-          <p:cNvSpPr/>
-          <p:nvPr/>
-        </p:nvSpPr>
-        <p:spPr>
-          <a:xfrm>
-            <a:off x="406301" y="1663154"/>
-            <a:ext cx="8498026" cy="426541"/>
-          </a:xfrm>
-          <a:prstGeom prst="rect">
-            <a:avLst/>
-          </a:prstGeom>
-          <a:noFill/>
-          <a:ln/>
-        </p:spPr>
-        <p:txBody>
-          <a:bodyPr wrap="square" lIns="0" tIns="0" rIns="0" bIns="0" rtlCol="0" anchor="t"/>
-          <a:lstStyle/>
-          <a:p>
-            <a:pPr algn="l" indent="0" marL="0">
-              <a:lnSpc>
-                <a:spcPts val="1680"/>
-              </a:lnSpc>
-              <a:spcBef>
-                <a:spcPts val="300"/>
-              </a:spcBef>
-              <a:spcAft>
-                <a:spcPts val="300"/>
-              </a:spcAft>
-              <a:buNone/>
-            </a:pPr>
-            <a:r>
-              <a:rPr lang="en-US" sz="1200" dirty="0">
-                <a:solidFill>
-                  <a:srgbClr val="1C2833"/>
-                </a:solidFill>
-                <a:latin typeface="Arial" pitchFamily="34" charset="0"/>
-                <a:ea typeface="Arial" pitchFamily="34" charset="-122"/>
-                <a:cs typeface="Arial" pitchFamily="34" charset="-120"/>
-              </a:rPr>
-              <a:t>After the rounds, students lie in </a:t>
-            </a:r>
-            <a:pPr algn="l" indent="0" marL="0">
-              <a:lnSpc>
-                <a:spcPts val="1680"/>
-              </a:lnSpc>
-              <a:spcBef>
-                <a:spcPts val="300"/>
-              </a:spcBef>
-              <a:spcAft>
-                <a:spcPts val="300"/>
-              </a:spcAft>
-              <a:buNone/>
-            </a:pPr>
-            <a:r>
-              <a:rPr lang="en-US" sz="1200" i="1" dirty="0">
-                <a:solidFill>
-                  <a:srgbClr val="1C2833"/>
-                </a:solidFill>
-                <a:latin typeface="Arial" pitchFamily="34" charset="0"/>
-                <a:ea typeface="Arial" pitchFamily="34" charset="-122"/>
-                <a:cs typeface="Arial" pitchFamily="34" charset="-120"/>
-              </a:rPr>
-              <a:t>śavāsana</a:t>
-            </a:r>
-            <a:pPr algn="l" indent="0" marL="0">
-              <a:lnSpc>
-                <a:spcPts val="1680"/>
-              </a:lnSpc>
-              <a:spcBef>
-                <a:spcPts val="300"/>
-              </a:spcBef>
-              <a:spcAft>
-                <a:spcPts val="300"/>
-              </a:spcAft>
-              <a:buNone/>
-            </a:pPr>
-            <a:r>
-              <a:rPr lang="en-US" sz="1200" dirty="0">
-                <a:solidFill>
-                  <a:srgbClr val="1C2833"/>
-                </a:solidFill>
-                <a:latin typeface="Arial" pitchFamily="34" charset="0"/>
-                <a:ea typeface="Arial" pitchFamily="34" charset="-122"/>
-                <a:cs typeface="Arial" pitchFamily="34" charset="-120"/>
-              </a:rPr>
-              <a:t> (corpse pose — flat on the back, arms slightly out, palms up) for 2 minutes to integrate.</a:t>
-            </a:r>
-            <a:endParaRPr lang="en-US" sz="1200" dirty="0"/>
-          </a:p>
-        </p:txBody>
-      </p:sp>
-      <p:sp>
-        <p:nvSpPr>
-          <p:cNvPr id="7" name="Text 5"/>
           <p:cNvSpPr/>
           <p:nvPr/>
         </p:nvSpPr>
@@ -6189,7 +6407,7 @@
                 <a:ea typeface="Georgia" pitchFamily="34" charset="-122"/>
                 <a:cs typeface="Georgia" pitchFamily="34" charset="-120"/>
               </a:rPr>
-              <a:t>Mid-module formative quiz (15 min)</a:t>
+              <a:t>Core (5 min) — The breath pattern (cont.)</a:t>
             </a:r>
             <a:endParaRPr lang="en-US" sz="1800" dirty="0"/>
           </a:p>
@@ -6203,8 +6421,8 @@
         </p:nvSpPr>
         <p:spPr>
           <a:xfrm>
-            <a:off x="406301" y="870942"/>
-            <a:ext cx="8498026" cy="436066"/>
+            <a:off x="634901" y="883593"/>
+            <a:ext cx="8102798" cy="2719685"/>
           </a:xfrm>
           <a:prstGeom prst="rect">
             <a:avLst/>
@@ -6216,13 +6434,31 @@
           <a:bodyPr wrap="square" lIns="0" tIns="0" rIns="0" bIns="0" rtlCol="0" anchor="t"/>
           <a:lstStyle/>
           <a:p>
-            <a:pPr algn="l" indent="0" marL="0">
-              <a:lnSpc>
-                <a:spcPts val="1680"/>
-              </a:lnSpc>
-              <a:spcBef>
-                <a:spcPts val="300"/>
-              </a:spcBef>
+            <a:pPr algn="l" marL="342900" indent="-342900">
+              <a:lnSpc>
+                <a:spcPts val="1620"/>
+              </a:lnSpc>
+              <a:spcAft>
+                <a:spcPts val="300"/>
+              </a:spcAft>
+              <a:buSzPct val="100000"/>
+              <a:buChar char="•"/>
+            </a:pPr>
+            <a:r>
+              <a:rPr lang="en-US" sz="1200" b="1" dirty="0">
+                <a:solidFill>
+                  <a:srgbClr val="1C2833"/>
+                </a:solidFill>
+                <a:latin typeface="Arial" pitchFamily="34" charset="0"/>
+                <a:ea typeface="Arial" pitchFamily="34" charset="-122"/>
+                <a:cs typeface="Arial" pitchFamily="34" charset="-120"/>
+              </a:rPr>
+              <a:t>1</a:t>
+            </a:r>
+            <a:pPr algn="l" indent="0" marL="0">
+              <a:lnSpc>
+                <a:spcPts val="1620"/>
+              </a:lnSpc>
               <a:spcAft>
                 <a:spcPts val="300"/>
               </a:spcAft>
@@ -6237,15 +6473,36 @@
                 <a:ea typeface="Arial" pitchFamily="34" charset="-122"/>
                 <a:cs typeface="Arial" pitchFamily="34" charset="-120"/>
               </a:rPr>
-              <a:t>– Hand out </a:t>
-            </a:r>
-            <a:pPr algn="l" indent="0" marL="0">
-              <a:lnSpc>
-                <a:spcPts val="1680"/>
-              </a:lnSpc>
-              <a:spcBef>
-                <a:spcPts val="300"/>
-              </a:spcBef>
+              <a:t> — praṇāmāsana · neutral / exhale</a:t>
+            </a:r>
+            <a:endParaRPr lang="en-US" sz="1200" dirty="0"/>
+          </a:p>
+          <a:p>
+            <a:pPr algn="l" marL="342900" indent="-342900">
+              <a:lnSpc>
+                <a:spcPts val="1620"/>
+              </a:lnSpc>
+              <a:spcAft>
+                <a:spcPts val="300"/>
+              </a:spcAft>
+              <a:buSzPct val="100000"/>
+              <a:buChar char="•"/>
+            </a:pPr>
+            <a:r>
+              <a:rPr lang="en-US" sz="1200" b="1" dirty="0">
+                <a:solidFill>
+                  <a:srgbClr val="1C2833"/>
+                </a:solidFill>
+                <a:latin typeface="Arial" pitchFamily="34" charset="0"/>
+                <a:ea typeface="Arial" pitchFamily="34" charset="-122"/>
+                <a:cs typeface="Arial" pitchFamily="34" charset="-120"/>
+              </a:rPr>
+              <a:t>2</a:t>
+            </a:r>
+            <a:pPr algn="l" indent="0" marL="0">
+              <a:lnSpc>
+                <a:spcPts val="1620"/>
+              </a:lnSpc>
               <a:spcAft>
                 <a:spcPts val="300"/>
               </a:spcAft>
@@ -6260,15 +6517,56 @@
                 <a:ea typeface="Arial" pitchFamily="34" charset="-122"/>
                 <a:cs typeface="Arial" pitchFamily="34" charset="-120"/>
               </a:rPr>
-              <a:t>quizzes/formative.md</a:t>
-            </a:r>
-            <a:pPr algn="l" indent="0" marL="0">
-              <a:lnSpc>
-                <a:spcPts val="1680"/>
-              </a:lnSpc>
-              <a:spcBef>
-                <a:spcPts val="300"/>
-              </a:spcBef>
+              <a:t> — hasta-uttānāsana · </a:t>
+            </a:r>
+            <a:pPr algn="l" indent="0" marL="0">
+              <a:lnSpc>
+                <a:spcPts val="1620"/>
+              </a:lnSpc>
+              <a:spcAft>
+                <a:spcPts val="300"/>
+              </a:spcAft>
+              <a:buNone/>
+            </a:pPr>
+            <a:r>
+              <a:rPr lang="en-US" sz="1200" b="1" dirty="0">
+                <a:solidFill>
+                  <a:srgbClr val="1C2833"/>
+                </a:solidFill>
+                <a:latin typeface="Arial" pitchFamily="34" charset="0"/>
+                <a:ea typeface="Arial" pitchFamily="34" charset="-122"/>
+                <a:cs typeface="Arial" pitchFamily="34" charset="-120"/>
+              </a:rPr>
+              <a:t>inhale</a:t>
+            </a:r>
+            <a:endParaRPr lang="en-US" sz="1200" dirty="0"/>
+          </a:p>
+          <a:p>
+            <a:pPr algn="l" marL="342900" indent="-342900">
+              <a:lnSpc>
+                <a:spcPts val="1620"/>
+              </a:lnSpc>
+              <a:spcAft>
+                <a:spcPts val="300"/>
+              </a:spcAft>
+              <a:buSzPct val="100000"/>
+              <a:buChar char="•"/>
+            </a:pPr>
+            <a:r>
+              <a:rPr lang="en-US" sz="1200" b="1" dirty="0">
+                <a:solidFill>
+                  <a:srgbClr val="1C2833"/>
+                </a:solidFill>
+                <a:latin typeface="Arial" pitchFamily="34" charset="0"/>
+                <a:ea typeface="Arial" pitchFamily="34" charset="-122"/>
+                <a:cs typeface="Arial" pitchFamily="34" charset="-120"/>
+              </a:rPr>
+              <a:t>3</a:t>
+            </a:r>
+            <a:pPr algn="l" indent="0" marL="0">
+              <a:lnSpc>
+                <a:spcPts val="1620"/>
+              </a:lnSpc>
               <a:spcAft>
                 <a:spcPts val="300"/>
               </a:spcAft>
@@ -6283,7 +6581,559 @@
                 <a:ea typeface="Arial" pitchFamily="34" charset="-122"/>
                 <a:cs typeface="Arial" pitchFamily="34" charset="-120"/>
               </a:rPr>
-              <a:t> Part B. – 8 questions: name the 8 limbs in order, name 3 of the 5 foundational āsanas, identify the breath assigned to 3 SN poses, short answer "what is yoga?"</a:t>
+              <a:t> — uttānāsana · </a:t>
+            </a:r>
+            <a:pPr algn="l" indent="0" marL="0">
+              <a:lnSpc>
+                <a:spcPts val="1620"/>
+              </a:lnSpc>
+              <a:spcAft>
+                <a:spcPts val="300"/>
+              </a:spcAft>
+              <a:buNone/>
+            </a:pPr>
+            <a:r>
+              <a:rPr lang="en-US" sz="1200" b="1" dirty="0">
+                <a:solidFill>
+                  <a:srgbClr val="1C2833"/>
+                </a:solidFill>
+                <a:latin typeface="Arial" pitchFamily="34" charset="0"/>
+                <a:ea typeface="Arial" pitchFamily="34" charset="-122"/>
+                <a:cs typeface="Arial" pitchFamily="34" charset="-120"/>
+              </a:rPr>
+              <a:t>exhale</a:t>
+            </a:r>
+            <a:endParaRPr lang="en-US" sz="1200" dirty="0"/>
+          </a:p>
+          <a:p>
+            <a:pPr algn="l" marL="342900" indent="-342900">
+              <a:lnSpc>
+                <a:spcPts val="1620"/>
+              </a:lnSpc>
+              <a:spcAft>
+                <a:spcPts val="300"/>
+              </a:spcAft>
+              <a:buSzPct val="100000"/>
+              <a:buChar char="•"/>
+            </a:pPr>
+            <a:r>
+              <a:rPr lang="en-US" sz="1200" b="1" dirty="0">
+                <a:solidFill>
+                  <a:srgbClr val="1C2833"/>
+                </a:solidFill>
+                <a:latin typeface="Arial" pitchFamily="34" charset="0"/>
+                <a:ea typeface="Arial" pitchFamily="34" charset="-122"/>
+                <a:cs typeface="Arial" pitchFamily="34" charset="-120"/>
+              </a:rPr>
+              <a:t>4</a:t>
+            </a:r>
+            <a:pPr algn="l" indent="0" marL="0">
+              <a:lnSpc>
+                <a:spcPts val="1620"/>
+              </a:lnSpc>
+              <a:spcAft>
+                <a:spcPts val="300"/>
+              </a:spcAft>
+              <a:buNone/>
+            </a:pPr>
+            <a:r>
+              <a:rPr lang="en-US" sz="1200" dirty="0">
+                <a:solidFill>
+                  <a:srgbClr val="1C2833"/>
+                </a:solidFill>
+                <a:latin typeface="Arial" pitchFamily="34" charset="0"/>
+                <a:ea typeface="Arial" pitchFamily="34" charset="-122"/>
+                <a:cs typeface="Arial" pitchFamily="34" charset="-120"/>
+              </a:rPr>
+              <a:t> — aśva-sañcalanāsana · </a:t>
+            </a:r>
+            <a:pPr algn="l" indent="0" marL="0">
+              <a:lnSpc>
+                <a:spcPts val="1620"/>
+              </a:lnSpc>
+              <a:spcAft>
+                <a:spcPts val="300"/>
+              </a:spcAft>
+              <a:buNone/>
+            </a:pPr>
+            <a:r>
+              <a:rPr lang="en-US" sz="1200" b="1" dirty="0">
+                <a:solidFill>
+                  <a:srgbClr val="1C2833"/>
+                </a:solidFill>
+                <a:latin typeface="Arial" pitchFamily="34" charset="0"/>
+                <a:ea typeface="Arial" pitchFamily="34" charset="-122"/>
+                <a:cs typeface="Arial" pitchFamily="34" charset="-120"/>
+              </a:rPr>
+              <a:t>inhale</a:t>
+            </a:r>
+            <a:endParaRPr lang="en-US" sz="1200" dirty="0"/>
+          </a:p>
+          <a:p>
+            <a:pPr algn="l" marL="342900" indent="-342900">
+              <a:lnSpc>
+                <a:spcPts val="1620"/>
+              </a:lnSpc>
+              <a:spcAft>
+                <a:spcPts val="300"/>
+              </a:spcAft>
+              <a:buSzPct val="100000"/>
+              <a:buChar char="•"/>
+            </a:pPr>
+            <a:r>
+              <a:rPr lang="en-US" sz="1200" b="1" dirty="0">
+                <a:solidFill>
+                  <a:srgbClr val="1C2833"/>
+                </a:solidFill>
+                <a:latin typeface="Arial" pitchFamily="34" charset="0"/>
+                <a:ea typeface="Arial" pitchFamily="34" charset="-122"/>
+                <a:cs typeface="Arial" pitchFamily="34" charset="-120"/>
+              </a:rPr>
+              <a:t>5</a:t>
+            </a:r>
+            <a:pPr algn="l" indent="0" marL="0">
+              <a:lnSpc>
+                <a:spcPts val="1620"/>
+              </a:lnSpc>
+              <a:spcAft>
+                <a:spcPts val="300"/>
+              </a:spcAft>
+              <a:buNone/>
+            </a:pPr>
+            <a:r>
+              <a:rPr lang="en-US" sz="1200" dirty="0">
+                <a:solidFill>
+                  <a:srgbClr val="1C2833"/>
+                </a:solidFill>
+                <a:latin typeface="Arial" pitchFamily="34" charset="0"/>
+                <a:ea typeface="Arial" pitchFamily="34" charset="-122"/>
+                <a:cs typeface="Arial" pitchFamily="34" charset="-120"/>
+              </a:rPr>
+              <a:t> — adho-mukha-śvānāsana · </a:t>
+            </a:r>
+            <a:pPr algn="l" indent="0" marL="0">
+              <a:lnSpc>
+                <a:spcPts val="1620"/>
+              </a:lnSpc>
+              <a:spcAft>
+                <a:spcPts val="300"/>
+              </a:spcAft>
+              <a:buNone/>
+            </a:pPr>
+            <a:r>
+              <a:rPr lang="en-US" sz="1200" b="1" dirty="0">
+                <a:solidFill>
+                  <a:srgbClr val="1C2833"/>
+                </a:solidFill>
+                <a:latin typeface="Arial" pitchFamily="34" charset="0"/>
+                <a:ea typeface="Arial" pitchFamily="34" charset="-122"/>
+                <a:cs typeface="Arial" pitchFamily="34" charset="-120"/>
+              </a:rPr>
+              <a:t>exhale</a:t>
+            </a:r>
+            <a:endParaRPr lang="en-US" sz="1200" dirty="0"/>
+          </a:p>
+          <a:p>
+            <a:pPr algn="l" marL="342900" indent="-342900">
+              <a:lnSpc>
+                <a:spcPts val="1620"/>
+              </a:lnSpc>
+              <a:spcAft>
+                <a:spcPts val="300"/>
+              </a:spcAft>
+              <a:buSzPct val="100000"/>
+              <a:buChar char="•"/>
+            </a:pPr>
+            <a:r>
+              <a:rPr lang="en-US" sz="1200" b="1" dirty="0">
+                <a:solidFill>
+                  <a:srgbClr val="1C2833"/>
+                </a:solidFill>
+                <a:latin typeface="Arial" pitchFamily="34" charset="0"/>
+                <a:ea typeface="Arial" pitchFamily="34" charset="-122"/>
+                <a:cs typeface="Arial" pitchFamily="34" charset="-120"/>
+              </a:rPr>
+              <a:t>6</a:t>
+            </a:r>
+            <a:pPr algn="l" indent="0" marL="0">
+              <a:lnSpc>
+                <a:spcPts val="1620"/>
+              </a:lnSpc>
+              <a:spcAft>
+                <a:spcPts val="300"/>
+              </a:spcAft>
+              <a:buNone/>
+            </a:pPr>
+            <a:r>
+              <a:rPr lang="en-US" sz="1200" dirty="0">
+                <a:solidFill>
+                  <a:srgbClr val="1C2833"/>
+                </a:solidFill>
+                <a:latin typeface="Arial" pitchFamily="34" charset="0"/>
+                <a:ea typeface="Arial" pitchFamily="34" charset="-122"/>
+                <a:cs typeface="Arial" pitchFamily="34" charset="-120"/>
+              </a:rPr>
+              <a:t> — aṣṭāṅga-namaskāra · </a:t>
+            </a:r>
+            <a:pPr algn="l" indent="0" marL="0">
+              <a:lnSpc>
+                <a:spcPts val="1620"/>
+              </a:lnSpc>
+              <a:spcAft>
+                <a:spcPts val="300"/>
+              </a:spcAft>
+              <a:buNone/>
+            </a:pPr>
+            <a:r>
+              <a:rPr lang="en-US" sz="1200" b="1" dirty="0">
+                <a:solidFill>
+                  <a:srgbClr val="1C2833"/>
+                </a:solidFill>
+                <a:latin typeface="Arial" pitchFamily="34" charset="0"/>
+                <a:ea typeface="Arial" pitchFamily="34" charset="-122"/>
+                <a:cs typeface="Arial" pitchFamily="34" charset="-120"/>
+              </a:rPr>
+              <a:t>hold</a:t>
+            </a:r>
+            <a:pPr algn="l" indent="0" marL="0">
+              <a:lnSpc>
+                <a:spcPts val="1620"/>
+              </a:lnSpc>
+              <a:spcAft>
+                <a:spcPts val="300"/>
+              </a:spcAft>
+              <a:buNone/>
+            </a:pPr>
+            <a:r>
+              <a:rPr lang="en-US" sz="1200" dirty="0">
+                <a:solidFill>
+                  <a:srgbClr val="1C2833"/>
+                </a:solidFill>
+                <a:latin typeface="Arial" pitchFamily="34" charset="0"/>
+                <a:ea typeface="Arial" pitchFamily="34" charset="-122"/>
+                <a:cs typeface="Arial" pitchFamily="34" charset="-120"/>
+              </a:rPr>
+              <a:t> breath out (very brief)</a:t>
+            </a:r>
+            <a:endParaRPr lang="en-US" sz="1200" dirty="0"/>
+          </a:p>
+          <a:p>
+            <a:pPr algn="l" marL="342900" indent="-342900">
+              <a:lnSpc>
+                <a:spcPts val="1620"/>
+              </a:lnSpc>
+              <a:spcAft>
+                <a:spcPts val="300"/>
+              </a:spcAft>
+              <a:buSzPct val="100000"/>
+              <a:buChar char="•"/>
+            </a:pPr>
+            <a:r>
+              <a:rPr lang="en-US" sz="1200" b="1" dirty="0">
+                <a:solidFill>
+                  <a:srgbClr val="1C2833"/>
+                </a:solidFill>
+                <a:latin typeface="Arial" pitchFamily="34" charset="0"/>
+                <a:ea typeface="Arial" pitchFamily="34" charset="-122"/>
+                <a:cs typeface="Arial" pitchFamily="34" charset="-120"/>
+              </a:rPr>
+              <a:t>7</a:t>
+            </a:r>
+            <a:pPr algn="l" indent="0" marL="0">
+              <a:lnSpc>
+                <a:spcPts val="1620"/>
+              </a:lnSpc>
+              <a:spcAft>
+                <a:spcPts val="300"/>
+              </a:spcAft>
+              <a:buNone/>
+            </a:pPr>
+            <a:r>
+              <a:rPr lang="en-US" sz="1200" dirty="0">
+                <a:solidFill>
+                  <a:srgbClr val="1C2833"/>
+                </a:solidFill>
+                <a:latin typeface="Arial" pitchFamily="34" charset="0"/>
+                <a:ea typeface="Arial" pitchFamily="34" charset="-122"/>
+                <a:cs typeface="Arial" pitchFamily="34" charset="-120"/>
+              </a:rPr>
+              <a:t> — bhujaṅgāsana · </a:t>
+            </a:r>
+            <a:pPr algn="l" indent="0" marL="0">
+              <a:lnSpc>
+                <a:spcPts val="1620"/>
+              </a:lnSpc>
+              <a:spcAft>
+                <a:spcPts val="300"/>
+              </a:spcAft>
+              <a:buNone/>
+            </a:pPr>
+            <a:r>
+              <a:rPr lang="en-US" sz="1200" b="1" dirty="0">
+                <a:solidFill>
+                  <a:srgbClr val="1C2833"/>
+                </a:solidFill>
+                <a:latin typeface="Arial" pitchFamily="34" charset="0"/>
+                <a:ea typeface="Arial" pitchFamily="34" charset="-122"/>
+                <a:cs typeface="Arial" pitchFamily="34" charset="-120"/>
+              </a:rPr>
+              <a:t>inhale</a:t>
+            </a:r>
+            <a:endParaRPr lang="en-US" sz="1200" dirty="0"/>
+          </a:p>
+          <a:p>
+            <a:pPr algn="l" marL="342900" indent="-342900">
+              <a:lnSpc>
+                <a:spcPts val="1620"/>
+              </a:lnSpc>
+              <a:spcAft>
+                <a:spcPts val="300"/>
+              </a:spcAft>
+              <a:buSzPct val="100000"/>
+              <a:buChar char="•"/>
+            </a:pPr>
+            <a:r>
+              <a:rPr lang="en-US" sz="1200" b="1" dirty="0">
+                <a:solidFill>
+                  <a:srgbClr val="1C2833"/>
+                </a:solidFill>
+                <a:latin typeface="Arial" pitchFamily="34" charset="0"/>
+                <a:ea typeface="Arial" pitchFamily="34" charset="-122"/>
+                <a:cs typeface="Arial" pitchFamily="34" charset="-120"/>
+              </a:rPr>
+              <a:t>8</a:t>
+            </a:r>
+            <a:pPr algn="l" indent="0" marL="0">
+              <a:lnSpc>
+                <a:spcPts val="1620"/>
+              </a:lnSpc>
+              <a:spcAft>
+                <a:spcPts val="300"/>
+              </a:spcAft>
+              <a:buNone/>
+            </a:pPr>
+            <a:r>
+              <a:rPr lang="en-US" sz="1200" dirty="0">
+                <a:solidFill>
+                  <a:srgbClr val="1C2833"/>
+                </a:solidFill>
+                <a:latin typeface="Arial" pitchFamily="34" charset="0"/>
+                <a:ea typeface="Arial" pitchFamily="34" charset="-122"/>
+                <a:cs typeface="Arial" pitchFamily="34" charset="-120"/>
+              </a:rPr>
+              <a:t> — adho-mukha-śvānāsana · </a:t>
+            </a:r>
+            <a:pPr algn="l" indent="0" marL="0">
+              <a:lnSpc>
+                <a:spcPts val="1620"/>
+              </a:lnSpc>
+              <a:spcAft>
+                <a:spcPts val="300"/>
+              </a:spcAft>
+              <a:buNone/>
+            </a:pPr>
+            <a:r>
+              <a:rPr lang="en-US" sz="1200" b="1" dirty="0">
+                <a:solidFill>
+                  <a:srgbClr val="1C2833"/>
+                </a:solidFill>
+                <a:latin typeface="Arial" pitchFamily="34" charset="0"/>
+                <a:ea typeface="Arial" pitchFamily="34" charset="-122"/>
+                <a:cs typeface="Arial" pitchFamily="34" charset="-120"/>
+              </a:rPr>
+              <a:t>exhale</a:t>
+            </a:r>
+            <a:endParaRPr lang="en-US" sz="1200" dirty="0"/>
+          </a:p>
+          <a:p>
+            <a:pPr algn="l" marL="342900" indent="-342900">
+              <a:lnSpc>
+                <a:spcPts val="1620"/>
+              </a:lnSpc>
+              <a:spcAft>
+                <a:spcPts val="300"/>
+              </a:spcAft>
+              <a:buSzPct val="100000"/>
+              <a:buChar char="•"/>
+            </a:pPr>
+            <a:r>
+              <a:rPr lang="en-US" sz="1200" b="1" dirty="0">
+                <a:solidFill>
+                  <a:srgbClr val="1C2833"/>
+                </a:solidFill>
+                <a:latin typeface="Arial" pitchFamily="34" charset="0"/>
+                <a:ea typeface="Arial" pitchFamily="34" charset="-122"/>
+                <a:cs typeface="Arial" pitchFamily="34" charset="-120"/>
+              </a:rPr>
+              <a:t>9</a:t>
+            </a:r>
+            <a:pPr algn="l" indent="0" marL="0">
+              <a:lnSpc>
+                <a:spcPts val="1620"/>
+              </a:lnSpc>
+              <a:spcAft>
+                <a:spcPts val="300"/>
+              </a:spcAft>
+              <a:buNone/>
+            </a:pPr>
+            <a:r>
+              <a:rPr lang="en-US" sz="1200" dirty="0">
+                <a:solidFill>
+                  <a:srgbClr val="1C2833"/>
+                </a:solidFill>
+                <a:latin typeface="Arial" pitchFamily="34" charset="0"/>
+                <a:ea typeface="Arial" pitchFamily="34" charset="-122"/>
+                <a:cs typeface="Arial" pitchFamily="34" charset="-120"/>
+              </a:rPr>
+              <a:t> — aśva-sañcalanāsana · </a:t>
+            </a:r>
+            <a:pPr algn="l" indent="0" marL="0">
+              <a:lnSpc>
+                <a:spcPts val="1620"/>
+              </a:lnSpc>
+              <a:spcAft>
+                <a:spcPts val="300"/>
+              </a:spcAft>
+              <a:buNone/>
+            </a:pPr>
+            <a:r>
+              <a:rPr lang="en-US" sz="1200" b="1" dirty="0">
+                <a:solidFill>
+                  <a:srgbClr val="1C2833"/>
+                </a:solidFill>
+                <a:latin typeface="Arial" pitchFamily="34" charset="0"/>
+                <a:ea typeface="Arial" pitchFamily="34" charset="-122"/>
+                <a:cs typeface="Arial" pitchFamily="34" charset="-120"/>
+              </a:rPr>
+              <a:t>inhale</a:t>
+            </a:r>
+            <a:endParaRPr lang="en-US" sz="1200" dirty="0"/>
+          </a:p>
+          <a:p>
+            <a:pPr algn="l" marL="342900" indent="-342900">
+              <a:lnSpc>
+                <a:spcPts val="1620"/>
+              </a:lnSpc>
+              <a:spcAft>
+                <a:spcPts val="300"/>
+              </a:spcAft>
+              <a:buSzPct val="100000"/>
+              <a:buChar char="•"/>
+            </a:pPr>
+            <a:r>
+              <a:rPr lang="en-US" sz="1200" b="1" dirty="0">
+                <a:solidFill>
+                  <a:srgbClr val="1C2833"/>
+                </a:solidFill>
+                <a:latin typeface="Arial" pitchFamily="34" charset="0"/>
+                <a:ea typeface="Arial" pitchFamily="34" charset="-122"/>
+                <a:cs typeface="Arial" pitchFamily="34" charset="-120"/>
+              </a:rPr>
+              <a:t>10</a:t>
+            </a:r>
+            <a:pPr algn="l" indent="0" marL="0">
+              <a:lnSpc>
+                <a:spcPts val="1620"/>
+              </a:lnSpc>
+              <a:spcAft>
+                <a:spcPts val="300"/>
+              </a:spcAft>
+              <a:buNone/>
+            </a:pPr>
+            <a:r>
+              <a:rPr lang="en-US" sz="1200" dirty="0">
+                <a:solidFill>
+                  <a:srgbClr val="1C2833"/>
+                </a:solidFill>
+                <a:latin typeface="Arial" pitchFamily="34" charset="0"/>
+                <a:ea typeface="Arial" pitchFamily="34" charset="-122"/>
+                <a:cs typeface="Arial" pitchFamily="34" charset="-120"/>
+              </a:rPr>
+              <a:t> — uttānāsana · </a:t>
+            </a:r>
+            <a:pPr algn="l" indent="0" marL="0">
+              <a:lnSpc>
+                <a:spcPts val="1620"/>
+              </a:lnSpc>
+              <a:spcAft>
+                <a:spcPts val="300"/>
+              </a:spcAft>
+              <a:buNone/>
+            </a:pPr>
+            <a:r>
+              <a:rPr lang="en-US" sz="1200" b="1" dirty="0">
+                <a:solidFill>
+                  <a:srgbClr val="1C2833"/>
+                </a:solidFill>
+                <a:latin typeface="Arial" pitchFamily="34" charset="0"/>
+                <a:ea typeface="Arial" pitchFamily="34" charset="-122"/>
+                <a:cs typeface="Arial" pitchFamily="34" charset="-120"/>
+              </a:rPr>
+              <a:t>exhale</a:t>
+            </a:r>
+            <a:endParaRPr lang="en-US" sz="1200" dirty="0"/>
+          </a:p>
+          <a:p>
+            <a:pPr algn="l" marL="342900" indent="-342900">
+              <a:lnSpc>
+                <a:spcPts val="1620"/>
+              </a:lnSpc>
+              <a:spcAft>
+                <a:spcPts val="300"/>
+              </a:spcAft>
+              <a:buSzPct val="100000"/>
+              <a:buChar char="•"/>
+            </a:pPr>
+            <a:r>
+              <a:rPr lang="en-US" sz="1200" b="1" dirty="0">
+                <a:solidFill>
+                  <a:srgbClr val="1C2833"/>
+                </a:solidFill>
+                <a:latin typeface="Arial" pitchFamily="34" charset="0"/>
+                <a:ea typeface="Arial" pitchFamily="34" charset="-122"/>
+                <a:cs typeface="Arial" pitchFamily="34" charset="-120"/>
+              </a:rPr>
+              <a:t>11</a:t>
+            </a:r>
+            <a:pPr algn="l" indent="0" marL="0">
+              <a:lnSpc>
+                <a:spcPts val="1620"/>
+              </a:lnSpc>
+              <a:spcAft>
+                <a:spcPts val="300"/>
+              </a:spcAft>
+              <a:buNone/>
+            </a:pPr>
+            <a:r>
+              <a:rPr lang="en-US" sz="1200" dirty="0">
+                <a:solidFill>
+                  <a:srgbClr val="1C2833"/>
+                </a:solidFill>
+                <a:latin typeface="Arial" pitchFamily="34" charset="0"/>
+                <a:ea typeface="Arial" pitchFamily="34" charset="-122"/>
+                <a:cs typeface="Arial" pitchFamily="34" charset="-120"/>
+              </a:rPr>
+              <a:t> — hasta-uttānāsana · </a:t>
+            </a:r>
+            <a:pPr algn="l" indent="0" marL="0">
+              <a:lnSpc>
+                <a:spcPts val="1620"/>
+              </a:lnSpc>
+              <a:spcAft>
+                <a:spcPts val="300"/>
+              </a:spcAft>
+              <a:buNone/>
+            </a:pPr>
+            <a:r>
+              <a:rPr lang="en-US" sz="1200" b="1" dirty="0">
+                <a:solidFill>
+                  <a:srgbClr val="1C2833"/>
+                </a:solidFill>
+                <a:latin typeface="Arial" pitchFamily="34" charset="0"/>
+                <a:ea typeface="Arial" pitchFamily="34" charset="-122"/>
+                <a:cs typeface="Arial" pitchFamily="34" charset="-120"/>
+              </a:rPr>
+              <a:t>inhale</a:t>
             </a:r>
             <a:endParaRPr lang="en-US" sz="1200" dirty="0"/>
           </a:p>
@@ -6441,7 +7291,7 @@
                 <a:ea typeface="Georgia" pitchFamily="34" charset="-122"/>
                 <a:cs typeface="Georgia" pitchFamily="34" charset="-120"/>
               </a:rPr>
-              <a:t>Project commitment (6 min)</a:t>
+              <a:t>Core (5 min) — The breath pattern (cont.)</a:t>
             </a:r>
             <a:endParaRPr lang="en-US" sz="1800" dirty="0"/>
           </a:p>
@@ -6455,8 +7305,8 @@
         </p:nvSpPr>
         <p:spPr>
           <a:xfrm>
-            <a:off x="406301" y="870942"/>
-            <a:ext cx="8498026" cy="426541"/>
+            <a:off x="634901" y="883593"/>
+            <a:ext cx="8102798" cy="281880"/>
           </a:xfrm>
           <a:prstGeom prst="rect">
             <a:avLst/>
@@ -6468,6 +7318,92 @@
           <a:bodyPr wrap="square" lIns="0" tIns="0" rIns="0" bIns="0" rtlCol="0" anchor="t"/>
           <a:lstStyle/>
           <a:p>
+            <a:pPr algn="l" marL="342900" indent="-342900">
+              <a:lnSpc>
+                <a:spcPts val="1620"/>
+              </a:lnSpc>
+              <a:spcAft>
+                <a:spcPts val="300"/>
+              </a:spcAft>
+              <a:buSzPct val="100000"/>
+              <a:buChar char="•"/>
+            </a:pPr>
+            <a:r>
+              <a:rPr lang="en-US" sz="1200" b="1" dirty="0">
+                <a:solidFill>
+                  <a:srgbClr val="1C2833"/>
+                </a:solidFill>
+                <a:latin typeface="Arial" pitchFamily="34" charset="0"/>
+                <a:ea typeface="Arial" pitchFamily="34" charset="-122"/>
+                <a:cs typeface="Arial" pitchFamily="34" charset="-120"/>
+              </a:rPr>
+              <a:t>12</a:t>
+            </a:r>
+            <a:pPr algn="l" indent="0" marL="0">
+              <a:lnSpc>
+                <a:spcPts val="1620"/>
+              </a:lnSpc>
+              <a:spcAft>
+                <a:spcPts val="300"/>
+              </a:spcAft>
+              <a:buNone/>
+            </a:pPr>
+            <a:r>
+              <a:rPr lang="en-US" sz="1200" dirty="0">
+                <a:solidFill>
+                  <a:srgbClr val="1C2833"/>
+                </a:solidFill>
+                <a:latin typeface="Arial" pitchFamily="34" charset="0"/>
+                <a:ea typeface="Arial" pitchFamily="34" charset="-122"/>
+                <a:cs typeface="Arial" pitchFamily="34" charset="-120"/>
+              </a:rPr>
+              <a:t> — praṇāmāsana · </a:t>
+            </a:r>
+            <a:pPr algn="l" indent="0" marL="0">
+              <a:lnSpc>
+                <a:spcPts val="1620"/>
+              </a:lnSpc>
+              <a:spcAft>
+                <a:spcPts val="300"/>
+              </a:spcAft>
+              <a:buNone/>
+            </a:pPr>
+            <a:r>
+              <a:rPr lang="en-US" sz="1200" b="1" dirty="0">
+                <a:solidFill>
+                  <a:srgbClr val="1C2833"/>
+                </a:solidFill>
+                <a:latin typeface="Arial" pitchFamily="34" charset="0"/>
+                <a:ea typeface="Arial" pitchFamily="34" charset="-122"/>
+                <a:cs typeface="Arial" pitchFamily="34" charset="-120"/>
+              </a:rPr>
+              <a:t>exhale</a:t>
+            </a:r>
+            <a:endParaRPr lang="en-US" sz="1200" dirty="0"/>
+          </a:p>
+        </p:txBody>
+      </p:sp>
+      <p:sp>
+        <p:nvSpPr>
+          <p:cNvPr id="5" name="Text 3"/>
+          <p:cNvSpPr/>
+          <p:nvPr/>
+        </p:nvSpPr>
+        <p:spPr>
+          <a:xfrm>
+            <a:off x="406301" y="1254323"/>
+            <a:ext cx="8498026" cy="213271"/>
+          </a:xfrm>
+          <a:prstGeom prst="rect">
+            <a:avLst/>
+          </a:prstGeom>
+          <a:noFill/>
+          <a:ln/>
+        </p:spPr>
+        <p:txBody>
+          <a:bodyPr wrap="square" lIns="0" tIns="0" rIns="0" bIns="0" rtlCol="0" anchor="t"/>
+          <a:lstStyle/>
+          <a:p>
             <a:pPr algn="l" indent="0" marL="0">
               <a:lnSpc>
                 <a:spcPts val="1680"/>
@@ -6481,6 +7417,29 @@
               <a:buNone/>
             </a:pPr>
             <a:r>
+              <a:rPr lang="en-US" sz="1200" b="1" dirty="0">
+                <a:solidFill>
+                  <a:srgbClr val="1C2833"/>
+                </a:solidFill>
+                <a:latin typeface="Arial" pitchFamily="34" charset="0"/>
+                <a:ea typeface="Arial" pitchFamily="34" charset="-122"/>
+                <a:cs typeface="Arial" pitchFamily="34" charset="-120"/>
+              </a:rPr>
+              <a:t>Pattern to notice:</a:t>
+            </a:r>
+            <a:pPr algn="l" indent="0" marL="0">
+              <a:lnSpc>
+                <a:spcPts val="1680"/>
+              </a:lnSpc>
+              <a:spcBef>
+                <a:spcPts val="300"/>
+              </a:spcBef>
+              <a:spcAft>
+                <a:spcPts val="300"/>
+              </a:spcAft>
+              <a:buNone/>
+            </a:pPr>
+            <a:r>
               <a:rPr lang="en-US" sz="1200" dirty="0">
                 <a:solidFill>
                   <a:srgbClr val="1C2833"/>
@@ -6489,7 +7448,30 @@
                 <a:ea typeface="Arial" pitchFamily="34" charset="-122"/>
                 <a:cs typeface="Arial" pitchFamily="34" charset="-120"/>
               </a:rPr>
-              <a:t>– Hand out project brief. – Pairs / individuals choose target audience for their 5-min routine: peers / parents / younger siblings / classmates before a test. – Each pair writes audience + 1-sentence intent on sticky note. Posts on the board.</a:t>
+              <a:t> </a:t>
+            </a:r>
+            <a:pPr algn="l" indent="0" marL="0">
+              <a:lnSpc>
+                <a:spcPts val="1680"/>
+              </a:lnSpc>
+              <a:spcBef>
+                <a:spcPts val="300"/>
+              </a:spcBef>
+              <a:spcAft>
+                <a:spcPts val="300"/>
+              </a:spcAft>
+              <a:buNone/>
+            </a:pPr>
+            <a:r>
+              <a:rPr lang="en-US" sz="1200" i="1" dirty="0">
+                <a:solidFill>
+                  <a:srgbClr val="1C2833"/>
+                </a:solidFill>
+                <a:latin typeface="Arial" pitchFamily="34" charset="0"/>
+                <a:ea typeface="Arial" pitchFamily="34" charset="-122"/>
+                <a:cs typeface="Arial" pitchFamily="34" charset="-120"/>
+              </a:rPr>
+              <a:t>open the body = inhale; fold or close the body = exhale.</a:t>
             </a:r>
             <a:endParaRPr lang="en-US" sz="1200" dirty="0"/>
           </a:p>
@@ -6497,7 +7479,7 @@
       </p:sp>
       <p:sp>
         <p:nvSpPr>
-          <p:cNvPr id="5" name="Text 3"/>
+          <p:cNvPr id="6" name="Text 4"/>
           <p:cNvSpPr/>
           <p:nvPr/>
         </p:nvSpPr>
@@ -6647,7 +7629,7 @@
                 <a:ea typeface="Georgia" pitchFamily="34" charset="-122"/>
                 <a:cs typeface="Georgia" pitchFamily="34" charset="-120"/>
               </a:rPr>
-              <a:t>Wrap-up (2 min)</a:t>
+              <a:t>Practice (15 min) — 2 rounds with breath</a:t>
             </a:r>
             <a:endParaRPr lang="en-US" sz="1800" dirty="0"/>
           </a:p>
@@ -6661,8 +7643,8 @@
         </p:nvSpPr>
         <p:spPr>
           <a:xfrm>
-            <a:off x="406301" y="870942"/>
-            <a:ext cx="8498026" cy="426541"/>
+            <a:off x="634901" y="883593"/>
+            <a:ext cx="8102798" cy="769441"/>
           </a:xfrm>
           <a:prstGeom prst="rect">
             <a:avLst/>
@@ -6674,6 +7656,100 @@
           <a:bodyPr wrap="square" lIns="0" tIns="0" rIns="0" bIns="0" rtlCol="0" anchor="t"/>
           <a:lstStyle/>
           <a:p>
+            <a:pPr algn="l" marL="342900" indent="-342900">
+              <a:lnSpc>
+                <a:spcPts val="1620"/>
+              </a:lnSpc>
+              <a:spcAft>
+                <a:spcPts val="300"/>
+              </a:spcAft>
+              <a:buSzPct val="100000"/>
+              <a:buChar char="•"/>
+            </a:pPr>
+            <a:r>
+              <a:rPr lang="en-US" sz="1200" dirty="0">
+                <a:solidFill>
+                  <a:srgbClr val="1C2833"/>
+                </a:solidFill>
+                <a:latin typeface="Arial" pitchFamily="34" charset="0"/>
+                <a:ea typeface="Arial" pitchFamily="34" charset="-122"/>
+                <a:cs typeface="Arial" pitchFamily="34" charset="-120"/>
+              </a:rPr>
+              <a:t>5 min: walk through 1 round at slow pace, teacher calling each pose AND each breath.</a:t>
+            </a:r>
+            <a:endParaRPr lang="en-US" sz="1200" dirty="0"/>
+          </a:p>
+          <a:p>
+            <a:pPr algn="l" marL="342900" indent="-342900">
+              <a:lnSpc>
+                <a:spcPts val="1620"/>
+              </a:lnSpc>
+              <a:spcAft>
+                <a:spcPts val="300"/>
+              </a:spcAft>
+              <a:buSzPct val="100000"/>
+              <a:buChar char="•"/>
+            </a:pPr>
+            <a:r>
+              <a:rPr lang="en-US" sz="1200" dirty="0">
+                <a:solidFill>
+                  <a:srgbClr val="1C2833"/>
+                </a:solidFill>
+                <a:latin typeface="Arial" pitchFamily="34" charset="0"/>
+                <a:ea typeface="Arial" pitchFamily="34" charset="-122"/>
+                <a:cs typeface="Arial" pitchFamily="34" charset="-120"/>
+              </a:rPr>
+              <a:t>5 min: students do 1 round at their own pace, focused on breath.</a:t>
+            </a:r>
+            <a:endParaRPr lang="en-US" sz="1200" dirty="0"/>
+          </a:p>
+          <a:p>
+            <a:pPr algn="l" marL="342900" indent="-342900">
+              <a:lnSpc>
+                <a:spcPts val="1620"/>
+              </a:lnSpc>
+              <a:spcAft>
+                <a:spcPts val="300"/>
+              </a:spcAft>
+              <a:buSzPct val="100000"/>
+              <a:buChar char="•"/>
+            </a:pPr>
+            <a:r>
+              <a:rPr lang="en-US" sz="1200" dirty="0">
+                <a:solidFill>
+                  <a:srgbClr val="1C2833"/>
+                </a:solidFill>
+                <a:latin typeface="Arial" pitchFamily="34" charset="0"/>
+                <a:ea typeface="Arial" pitchFamily="34" charset="-122"/>
+                <a:cs typeface="Arial" pitchFamily="34" charset="-120"/>
+              </a:rPr>
+              <a:t>5 min: 1 more round, slightly faster, breath leading the movement.</a:t>
+            </a:r>
+            <a:endParaRPr lang="en-US" sz="1200" dirty="0"/>
+          </a:p>
+        </p:txBody>
+      </p:sp>
+      <p:sp>
+        <p:nvSpPr>
+          <p:cNvPr id="5" name="Text 3"/>
+          <p:cNvSpPr/>
+          <p:nvPr/>
+        </p:nvSpPr>
+        <p:spPr>
+          <a:xfrm>
+            <a:off x="406301" y="1741884"/>
+            <a:ext cx="8498026" cy="213271"/>
+          </a:xfrm>
+          <a:prstGeom prst="rect">
+            <a:avLst/>
+          </a:prstGeom>
+          <a:noFill/>
+          <a:ln/>
+        </p:spPr>
+        <p:txBody>
+          <a:bodyPr wrap="square" lIns="0" tIns="0" rIns="0" bIns="0" rtlCol="0" anchor="t"/>
+          <a:lstStyle/>
+          <a:p>
             <a:pPr algn="l" indent="0" marL="0">
               <a:lnSpc>
                 <a:spcPts val="1680"/>
@@ -6695,7 +7771,7 @@
                 <a:ea typeface="Arial" pitchFamily="34" charset="-122"/>
                 <a:cs typeface="Arial" pitchFamily="34" charset="-120"/>
               </a:rPr>
-              <a:t>– Quick share: each pair states aloud their audience. – Preview Day 6: </a:t>
+              <a:t>Two rounds total. </a:t>
             </a:r>
             <a:pPr algn="l" indent="0" marL="0">
               <a:lnSpc>
@@ -6710,15 +7786,38 @@
               <a:buNone/>
             </a:pPr>
             <a:r>
-              <a:rPr lang="en-US" sz="1200" i="1" dirty="0">
-                <a:solidFill>
-                  <a:srgbClr val="1C2833"/>
-                </a:solidFill>
-                <a:latin typeface="Arial" pitchFamily="34" charset="0"/>
-                <a:ea typeface="Arial" pitchFamily="34" charset="-122"/>
-                <a:cs typeface="Arial" pitchFamily="34" charset="-120"/>
-              </a:rPr>
-              <a:t>"Tomorrow we slow down dramatically — natural-breath observation. Just sitting with the breath."</a:t>
+              <a:rPr lang="en-US" sz="1200" b="1" dirty="0">
+                <a:solidFill>
+                  <a:srgbClr val="1C2833"/>
+                </a:solidFill>
+                <a:latin typeface="Arial" pitchFamily="34" charset="0"/>
+                <a:ea typeface="Arial" pitchFamily="34" charset="-122"/>
+                <a:cs typeface="Arial" pitchFamily="34" charset="-120"/>
+              </a:rPr>
+              <a:t>Do not exceed 3 rounds at this band.</a:t>
+            </a:r>
+            <a:pPr algn="l" indent="0" marL="0">
+              <a:lnSpc>
+                <a:spcPts val="1680"/>
+              </a:lnSpc>
+              <a:spcBef>
+                <a:spcPts val="300"/>
+              </a:spcBef>
+              <a:spcAft>
+                <a:spcPts val="300"/>
+              </a:spcAft>
+              <a:buNone/>
+            </a:pPr>
+            <a:r>
+              <a:rPr lang="en-US" sz="1200" dirty="0">
+                <a:solidFill>
+                  <a:srgbClr val="1C2833"/>
+                </a:solidFill>
+                <a:latin typeface="Arial" pitchFamily="34" charset="0"/>
+                <a:ea typeface="Arial" pitchFamily="34" charset="-122"/>
+                <a:cs typeface="Arial" pitchFamily="34" charset="-120"/>
+              </a:rPr>
+              <a:t> Quality over quantity.</a:t>
             </a:r>
             <a:endParaRPr lang="en-US" sz="1200" dirty="0"/>
           </a:p>
@@ -6726,7 +7825,7 @@
       </p:sp>
       <p:sp>
         <p:nvSpPr>
-          <p:cNvPr id="5" name="Text 3"/>
+          <p:cNvPr id="6" name="Text 4"/>
           <p:cNvSpPr/>
           <p:nvPr/>
         </p:nvSpPr>
